--- a/examples/from-documents/資料/方式提案.pptx
+++ b/examples/from-documents/資料/方式提案.pptx
@@ -4,16 +4,21 @@
   <p:sldMasterIdLst>
     <p:sldMasterId id="2147483648" r:id="rId1"/>
   </p:sldMasterIdLst>
+  <p:notesMasterIdLst>
+    <p:notesMasterId r:id="rId12"/>
+  </p:notesMasterIdLst>
   <p:sldIdLst>
     <p:sldId id="256" r:id="rId2"/>
     <p:sldId id="257" r:id="rId3"/>
     <p:sldId id="258" r:id="rId4"/>
     <p:sldId id="259" r:id="rId5"/>
     <p:sldId id="260" r:id="rId6"/>
+    <p:sldId id="261" r:id="rId7"/>
+    <p:sldId id="262" r:id="rId8"/>
+    <p:sldId id="263" r:id="rId9"/>
+    <p:sldId id="264" r:id="rId10"/>
+    <p:sldId id="265" r:id="rId11"/>
   </p:sldIdLst>
-  <p:notesMasterIdLst>
-    <p:notesMasterId r:id="rId7"/>
-  </p:notesMasterIdLst>
   <p:sldSz cx="12192000" cy="6858000"/>
   <p:notesSz cx="6858000" cy="9144000"/>
 </p:presentation>
@@ -22,6 +27,7 @@
 <file path=ppt/commentAuthors.xml><?xml version="1.0" encoding="utf-8"?>
 <p:cmAuthorLst xmlns:a="http://schemas.openxmlformats.org/drawingml/2006/main" xmlns:r="http://schemas.openxmlformats.org/officeDocument/2006/relationships" xmlns:p="http://schemas.openxmlformats.org/presentationml/2006/main">
   <p:cmAuthor id="1" name="鈴木（PMO）" initials="" lastIdx="1" clrIdx="0"/>
+  <p:cmAuthor id="2" name="高橋（インフラ）" initials="" lastIdx="1" clrIdx="1"/>
 </p:cmAuthorLst>
 </file>
 
@@ -30,6 +36,19 @@
   <p:cm authorId="1" dt="2026-07-30T10:00:00Z" idx="1">
     <p:pos x="100" y="100"/>
     <p:text>常駐は 2 名に減りました（2026-07 の体制変更）。図は 3 名のままです</p:text>
+  </p:cm>
+</p:cmLst>
+</file>
+
+<file path=ppt/comments/comment7.xml><?xml version="1.0" encoding="utf-8"?>
+<p:cmLst xmlns:a="http://schemas.openxmlformats.org/drawingml/2006/main" xmlns:r="http://schemas.openxmlformats.org/officeDocument/2006/relationships" xmlns:p="http://schemas.openxmlformats.org/presentationml/2006/main">
+  <p:cm authorId="1" dt="2026-07-30T11:00:00Z" idx="1">
+    <p:pos x="100" y="100"/>
+    <p:text>一括移行の停止時間は 48 時間では収まりません。実測で 62 時間でした（2026-06 のリハーサル）</p:text>
+  </p:cm>
+  <p:cm authorId="2" dt="2026-08-03T09:30:00Z" idx="1">
+    <p:pos x="100" y="100"/>
+    <p:text>並行稼働の費用「高」は回線費のみの試算です。要員費を入れると 3 倍になります</p:text>
   </p:cm>
 </p:cmLst>
 </file>
@@ -124,6 +143,213 @@
             <a:r>
               <a:rPr lang="ja-JP"/>
               <a:t>同じ検討をもう一度やることになるので採らなかった。</a:t>
+            </a:r>
+          </a:p>
+        </p:txBody>
+      </p:sp>
+    </p:spTree>
+  </p:cSld>
+</p:notes>
+</file>
+
+<file path=ppt/notesSlides/notesSlide4.xml><?xml version="1.0" encoding="utf-8"?>
+<p:notes xmlns:a="http://schemas.openxmlformats.org/drawingml/2006/main" xmlns:r="http://schemas.openxmlformats.org/officeDocument/2006/relationships" xmlns:p="http://schemas.openxmlformats.org/presentationml/2006/main">
+  <p:cSld>
+    <p:spTree>
+      <p:nvGrpSpPr>
+        <p:cNvPr id="1" name=""/>
+        <p:cNvGrpSpPr/>
+        <p:nvPr/>
+      </p:nvGrpSpPr>
+      <p:grpSpPr/>
+      <p:sp>
+        <p:nvSpPr>
+          <p:cNvPr id="2" name="スライド番号 プレースホルダー"/>
+          <p:cNvSpPr>
+            <a:spLocks noGrp="1"/>
+          </p:cNvSpPr>
+          <p:nvPr>
+            <p:ph type="sldNum"/>
+          </p:nvPr>
+        </p:nvSpPr>
+        <p:spPr/>
+        <p:txBody>
+          <a:bodyPr/>
+          <a:lstStyle/>
+          <a:p>
+            <a:r>
+              <a:rPr lang="ja-JP"/>
+              <a:t>4</a:t>
+            </a:r>
+          </a:p>
+        </p:txBody>
+      </p:sp>
+      <p:sp>
+        <p:nvSpPr>
+          <p:cNvPr id="3" name="ノート プレースホルダー"/>
+          <p:cNvSpPr>
+            <a:spLocks noGrp="1"/>
+          </p:cNvSpPr>
+          <p:nvPr>
+            <p:ph type="body" idx="1"/>
+          </p:nvPr>
+        </p:nvSpPr>
+        <p:spPr/>
+        <p:txBody>
+          <a:bodyPr/>
+          <a:lstStyle/>
+          <a:p>
+            <a:r>
+              <a:rPr lang="ja-JP"/>
+              <a:t>この図は現行の運用設計書（2019 年版）からの転記であり、</a:t>
+            </a:r>
+          </a:p>
+          <a:p>
+            <a:r>
+              <a:rPr lang="ja-JP"/>
+              <a:t>2023 年の EDI 更改は反映されていない。</a:t>
+            </a:r>
+          </a:p>
+          <a:p>
+            <a:r>
+              <a:rPr lang="ja-JP"/>
+              <a:t/>
+            </a:r>
+          </a:p>
+          <a:p>
+            <a:r>
+              <a:rPr lang="ja-JP"/>
+              <a:t>物流センターとの接続は現在 CSV の FTP 送信だが、</a:t>
+            </a:r>
+          </a:p>
+          <a:p>
+            <a:r>
+              <a:rPr lang="ja-JP"/>
+              <a:t>新システムでは Web API へ寄せる（別紙 7）。</a:t>
+            </a:r>
+          </a:p>
+        </p:txBody>
+      </p:sp>
+    </p:spTree>
+  </p:cSld>
+</p:notes>
+</file>
+
+<file path=ppt/notesSlides/notesSlide5.xml><?xml version="1.0" encoding="utf-8"?>
+<p:notes xmlns:a="http://schemas.openxmlformats.org/drawingml/2006/main" xmlns:r="http://schemas.openxmlformats.org/officeDocument/2006/relationships" xmlns:p="http://schemas.openxmlformats.org/presentationml/2006/main">
+  <p:cSld>
+    <p:spTree>
+      <p:nvGrpSpPr>
+        <p:cNvPr id="1" name=""/>
+        <p:cNvGrpSpPr/>
+        <p:nvPr/>
+      </p:nvGrpSpPr>
+      <p:grpSpPr/>
+      <p:sp>
+        <p:nvSpPr>
+          <p:cNvPr id="2" name="スライド番号 プレースホルダー"/>
+          <p:cNvSpPr>
+            <a:spLocks noGrp="1"/>
+          </p:cNvSpPr>
+          <p:nvPr>
+            <p:ph type="sldNum"/>
+          </p:nvPr>
+        </p:nvSpPr>
+        <p:spPr/>
+        <p:txBody>
+          <a:bodyPr/>
+          <a:lstStyle/>
+          <a:p>
+            <a:r>
+              <a:rPr lang="ja-JP"/>
+              <a:t>5</a:t>
+            </a:r>
+          </a:p>
+        </p:txBody>
+      </p:sp>
+      <p:sp>
+        <p:nvSpPr>
+          <p:cNvPr id="3" name="ノート プレースホルダー"/>
+          <p:cNvSpPr>
+            <a:spLocks noGrp="1"/>
+          </p:cNvSpPr>
+          <p:nvPr>
+            <p:ph type="body" idx="1"/>
+          </p:nvPr>
+        </p:nvSpPr>
+        <p:spPr/>
+        <p:txBody>
+          <a:bodyPr/>
+          <a:lstStyle/>
+          <a:p>
+            <a:r>
+              <a:rPr lang="ja-JP"/>
+              <a:t>画面の項目は別紙 2 に一覧がある。この絵からは読み取れないので、</a:t>
+            </a:r>
+          </a:p>
+          <a:p>
+            <a:r>
+              <a:rPr lang="ja-JP"/>
+              <a:t>移行後の画面設計はそちらを正とすること。</a:t>
+            </a:r>
+          </a:p>
+        </p:txBody>
+      </p:sp>
+    </p:spTree>
+  </p:cSld>
+</p:notes>
+</file>
+
+<file path=ppt/notesSlides/notesSlide7.xml><?xml version="1.0" encoding="utf-8"?>
+<p:notes xmlns:a="http://schemas.openxmlformats.org/drawingml/2006/main" xmlns:r="http://schemas.openxmlformats.org/officeDocument/2006/relationships" xmlns:p="http://schemas.openxmlformats.org/presentationml/2006/main">
+  <p:cSld>
+    <p:spTree>
+      <p:nvGrpSpPr>
+        <p:cNvPr id="1" name=""/>
+        <p:cNvGrpSpPr/>
+        <p:nvPr/>
+      </p:nvGrpSpPr>
+      <p:grpSpPr/>
+      <p:sp>
+        <p:nvSpPr>
+          <p:cNvPr id="2" name="スライド番号 プレースホルダー"/>
+          <p:cNvSpPr>
+            <a:spLocks noGrp="1"/>
+          </p:cNvSpPr>
+          <p:nvPr>
+            <p:ph type="sldNum"/>
+          </p:nvPr>
+        </p:nvSpPr>
+        <p:spPr/>
+        <p:txBody>
+          <a:bodyPr/>
+          <a:lstStyle/>
+          <a:p>
+            <a:r>
+              <a:rPr lang="ja-JP"/>
+              <a:t>7</a:t>
+            </a:r>
+          </a:p>
+        </p:txBody>
+      </p:sp>
+      <p:sp>
+        <p:nvSpPr>
+          <p:cNvPr id="3" name="ノート プレースホルダー"/>
+          <p:cNvSpPr>
+            <a:spLocks noGrp="1"/>
+          </p:cNvSpPr>
+          <p:nvPr>
+            <p:ph type="body" idx="1"/>
+          </p:nvPr>
+        </p:nvSpPr>
+        <p:spPr/>
+        <p:txBody>
+          <a:bodyPr/>
+          <a:lstStyle/>
+          <a:p>
+            <a:r>
+              <a:rPr lang="ja-JP"/>
+              <a:t>段階移行を推す。停止時間よりも切戻しの確実性を採った。</a:t>
             </a:r>
           </a:p>
         </p:txBody>
@@ -422,6 +648,21 @@
 </p:sld>
 </file>
 
+<file path=ppt/slides/slide10.xml><?xml version="1.0" encoding="utf-8"?>
+<p:sld xmlns:a="http://schemas.openxmlformats.org/drawingml/2006/main" xmlns:r="http://schemas.openxmlformats.org/officeDocument/2006/relationships" xmlns:p="http://schemas.openxmlformats.org/presentationml/2006/main">
+  <p:cSld>
+    <p:spTree>
+      <p:nvGrpSpPr>
+        <p:cNvPr id="1" name=""/>
+        <p:cNvGrpSpPr/>
+        <p:nvPr/>
+      </p:nvGrpSpPr>
+      <p:grpSpPr/>
+    </p:spTree>
+  </p:cSld>
+</p:sld>
+</file>
+
 <file path=ppt/slides/slide2.xml><?xml version="1.0" encoding="utf-8"?>
 <p:sld xmlns:a="http://schemas.openxmlformats.org/drawingml/2006/main" xmlns:r="http://schemas.openxmlformats.org/officeDocument/2006/relationships" xmlns:p="http://schemas.openxmlformats.org/presentationml/2006/main">
   <p:cSld>
@@ -890,6 +1131,1809 @@
 </file>
 
 <file path=ppt/slides/slide4.xml><?xml version="1.0" encoding="utf-8"?>
+<p:sld xmlns:a="http://schemas.openxmlformats.org/drawingml/2006/main" xmlns:r="http://schemas.openxmlformats.org/officeDocument/2006/relationships" xmlns:p="http://schemas.openxmlformats.org/presentationml/2006/main">
+  <p:cSld>
+    <p:spTree>
+      <p:nvGrpSpPr>
+        <p:cNvPr id="1" name=""/>
+        <p:cNvGrpSpPr/>
+        <p:nvPr/>
+      </p:nvGrpSpPr>
+      <p:grpSpPr/>
+      <p:sp>
+        <p:nvSpPr>
+          <p:cNvPr id="2" name="タイトル 1"/>
+          <p:cNvSpPr>
+            <a:spLocks noGrp="1"/>
+          </p:cNvSpPr>
+          <p:nvPr>
+            <p:ph type="title"/>
+          </p:nvPr>
+        </p:nvSpPr>
+        <p:spPr>
+          <a:xfrm>
+            <a:off x="700000" y="500000"/>
+            <a:ext cx="10792000" cy="1000000"/>
+          </a:xfrm>
+          <a:prstGeom prst="rect">
+            <a:avLst/>
+          </a:prstGeom>
+        </p:spPr>
+        <p:txBody>
+          <a:bodyPr/>
+          <a:lstStyle/>
+          <a:p>
+            <a:r>
+              <a:rPr lang="ja-JP"/>
+              <a:t>現行システム全体構成（ゾーン別）</a:t>
+            </a:r>
+          </a:p>
+        </p:txBody>
+      </p:sp>
+      <p:grpSp>
+        <p:nvGrpSpPr>
+          <p:cNvPr id="3" name="オンライン系" descr="現用／待機の 2 系統。DR サイトは別紙 5"/>
+          <p:cNvGrpSpPr/>
+          <p:nvPr/>
+        </p:nvGrpSpPr>
+        <p:grpSpPr>
+          <a:xfrm>
+            <a:off x="700000" y="1900000"/>
+            <a:ext cx="10300000" cy="900000"/>
+            <a:chOff x="700000" y="1900000"/>
+            <a:chExt cx="10300000" cy="900000"/>
+          </a:xfrm>
+        </p:grpSpPr>
+        <p:sp>
+          <p:nvSpPr>
+            <p:cNvPr id="4" name="受注入力"/>
+            <p:cNvSpPr>
+              <a:spLocks noGrp="1"/>
+            </p:cNvSpPr>
+            <p:nvPr/>
+          </p:nvSpPr>
+          <p:spPr>
+            <a:xfrm>
+              <a:off x="700000" y="1900000"/>
+              <a:ext cx="2200000" cy="900000"/>
+            </a:xfrm>
+            <a:prstGeom prst="rect">
+              <a:avLst/>
+            </a:prstGeom>
+          </p:spPr>
+          <p:txBody>
+            <a:bodyPr/>
+            <a:lstStyle/>
+            <a:p>
+              <a:r>
+                <a:rPr lang="ja-JP"/>
+                <a:t>受注入力</a:t>
+              </a:r>
+              <a:br/>
+              <a:r>
+                <a:rPr lang="ja-JP"/>
+                <a:t>（Web／代行）</a:t>
+              </a:r>
+            </a:p>
+          </p:txBody>
+        </p:sp>
+        <p:sp>
+          <p:nvSpPr>
+            <p:cNvPr id="5" name="与信照会"/>
+            <p:cNvSpPr>
+              <a:spLocks noGrp="1"/>
+            </p:cNvSpPr>
+            <p:nvPr/>
+          </p:nvSpPr>
+          <p:spPr>
+            <a:xfrm>
+              <a:off x="3400000" y="1900000"/>
+              <a:ext cx="2200000" cy="900000"/>
+            </a:xfrm>
+            <a:prstGeom prst="rect">
+              <a:avLst/>
+            </a:prstGeom>
+          </p:spPr>
+          <p:txBody>
+            <a:bodyPr/>
+            <a:lstStyle/>
+            <a:p>
+              <a:r>
+                <a:rPr lang="ja-JP"/>
+                <a:t>与信照会</a:t>
+              </a:r>
+            </a:p>
+          </p:txBody>
+        </p:sp>
+        <p:sp>
+          <p:nvSpPr>
+            <p:cNvPr id="6" name="在庫引当"/>
+            <p:cNvSpPr>
+              <a:spLocks noGrp="1"/>
+            </p:cNvSpPr>
+            <p:nvPr/>
+          </p:nvSpPr>
+          <p:spPr>
+            <a:xfrm>
+              <a:off x="6100000" y="1900000"/>
+              <a:ext cx="2200000" cy="900000"/>
+            </a:xfrm>
+            <a:prstGeom prst="rect">
+              <a:avLst/>
+            </a:prstGeom>
+          </p:spPr>
+          <p:txBody>
+            <a:bodyPr/>
+            <a:lstStyle/>
+            <a:p>
+              <a:r>
+                <a:rPr lang="ja-JP"/>
+                <a:t>在庫引当</a:t>
+              </a:r>
+            </a:p>
+          </p:txBody>
+        </p:sp>
+        <p:sp>
+          <p:nvSpPr>
+            <p:cNvPr id="7" name="出荷指示"/>
+            <p:cNvSpPr>
+              <a:spLocks noGrp="1"/>
+            </p:cNvSpPr>
+            <p:nvPr/>
+          </p:nvSpPr>
+          <p:spPr>
+            <a:xfrm>
+              <a:off x="8800000" y="1900000"/>
+              <a:ext cx="2200000" cy="900000"/>
+            </a:xfrm>
+            <a:prstGeom prst="rect">
+              <a:avLst/>
+            </a:prstGeom>
+          </p:spPr>
+          <p:txBody>
+            <a:bodyPr/>
+            <a:lstStyle/>
+            <a:p>
+              <a:r>
+                <a:rPr lang="ja-JP"/>
+                <a:t>出荷指示</a:t>
+              </a:r>
+            </a:p>
+          </p:txBody>
+        </p:sp>
+      </p:grpSp>
+      <p:grpSp>
+        <p:nvGrpSpPr>
+          <p:cNvPr id="8" name="バッチ系" descr="夜間バッチ。実行順は運用設計書 4.2 による"/>
+          <p:cNvGrpSpPr/>
+          <p:nvPr/>
+        </p:nvGrpSpPr>
+        <p:grpSpPr>
+          <a:xfrm>
+            <a:off x="700000" y="3500000"/>
+            <a:ext cx="10300000" cy="900000"/>
+            <a:chOff x="700000" y="3500000"/>
+            <a:chExt cx="10300000" cy="900000"/>
+          </a:xfrm>
+        </p:grpSpPr>
+        <p:sp>
+          <p:nvSpPr>
+            <p:cNvPr id="9" name="売上計上"/>
+            <p:cNvSpPr>
+              <a:spLocks noGrp="1"/>
+            </p:cNvSpPr>
+            <p:nvPr/>
+          </p:nvSpPr>
+          <p:spPr>
+            <a:xfrm>
+              <a:off x="700000" y="3500000"/>
+              <a:ext cx="2200000" cy="900000"/>
+            </a:xfrm>
+            <a:prstGeom prst="rect">
+              <a:avLst/>
+            </a:prstGeom>
+          </p:spPr>
+          <p:txBody>
+            <a:bodyPr/>
+            <a:lstStyle/>
+            <a:p>
+              <a:r>
+                <a:rPr lang="ja-JP"/>
+                <a:t>売上計上</a:t>
+              </a:r>
+            </a:p>
+          </p:txBody>
+        </p:sp>
+        <p:sp>
+          <p:nvSpPr>
+            <p:cNvPr id="10" name="請求締め"/>
+            <p:cNvSpPr>
+              <a:spLocks noGrp="1"/>
+            </p:cNvSpPr>
+            <p:nvPr/>
+          </p:nvSpPr>
+          <p:spPr>
+            <a:xfrm>
+              <a:off x="3400000" y="3500000"/>
+              <a:ext cx="2200000" cy="900000"/>
+            </a:xfrm>
+            <a:prstGeom prst="rect">
+              <a:avLst/>
+            </a:prstGeom>
+          </p:spPr>
+          <p:txBody>
+            <a:bodyPr/>
+            <a:lstStyle/>
+            <a:p>
+              <a:r>
+                <a:rPr lang="ja-JP"/>
+                <a:t>請求締め</a:t>
+              </a:r>
+              <a:br/>
+              <a:r>
+                <a:rPr lang="ja-JP"/>
+                <a:t>（月次）</a:t>
+              </a:r>
+            </a:p>
+          </p:txBody>
+        </p:sp>
+        <p:sp>
+          <p:nvSpPr>
+            <p:cNvPr id="11" name="会計連携"/>
+            <p:cNvSpPr>
+              <a:spLocks noGrp="1"/>
+            </p:cNvSpPr>
+            <p:nvPr/>
+          </p:nvSpPr>
+          <p:spPr>
+            <a:xfrm>
+              <a:off x="6100000" y="3500000"/>
+              <a:ext cx="2200000" cy="900000"/>
+            </a:xfrm>
+            <a:prstGeom prst="rect">
+              <a:avLst/>
+            </a:prstGeom>
+          </p:spPr>
+          <p:txBody>
+            <a:bodyPr/>
+            <a:lstStyle/>
+            <a:p>
+              <a:r>
+                <a:rPr lang="ja-JP"/>
+                <a:t>会計連携</a:t>
+              </a:r>
+            </a:p>
+          </p:txBody>
+        </p:sp>
+        <p:sp>
+          <p:nvSpPr>
+            <p:cNvPr id="12" name="帳票出力"/>
+            <p:cNvSpPr>
+              <a:spLocks noGrp="1"/>
+            </p:cNvSpPr>
+            <p:nvPr/>
+          </p:nvSpPr>
+          <p:spPr>
+            <a:xfrm>
+              <a:off x="8800000" y="3500000"/>
+              <a:ext cx="2200000" cy="900000"/>
+            </a:xfrm>
+            <a:prstGeom prst="rect">
+              <a:avLst/>
+            </a:prstGeom>
+          </p:spPr>
+          <p:txBody>
+            <a:bodyPr/>
+            <a:lstStyle/>
+            <a:p>
+              <a:r>
+                <a:rPr lang="ja-JP"/>
+                <a:t>帳票出力</a:t>
+              </a:r>
+            </a:p>
+          </p:txBody>
+        </p:sp>
+      </p:grpSp>
+      <p:grpSp>
+        <p:nvGrpSpPr>
+          <p:cNvPr id="13" name="外部接続"/>
+          <p:cNvGrpSpPr/>
+          <p:nvPr/>
+        </p:nvGrpSpPr>
+        <p:grpSpPr>
+          <a:xfrm>
+            <a:off x="700000" y="5100000"/>
+            <a:ext cx="10300000" cy="900000"/>
+            <a:chOff x="700000" y="5100000"/>
+            <a:chExt cx="10300000" cy="900000"/>
+          </a:xfrm>
+        </p:grpSpPr>
+        <p:sp>
+          <p:nvSpPr>
+            <p:cNvPr id="14" name="得意先EDI"/>
+            <p:cNvSpPr>
+              <a:spLocks noGrp="1"/>
+            </p:cNvSpPr>
+            <p:nvPr/>
+          </p:nvSpPr>
+          <p:spPr>
+            <a:xfrm>
+              <a:off x="700000" y="5100000"/>
+              <a:ext cx="2200000" cy="900000"/>
+            </a:xfrm>
+            <a:prstGeom prst="rect">
+              <a:avLst/>
+            </a:prstGeom>
+          </p:spPr>
+          <p:txBody>
+            <a:bodyPr/>
+            <a:lstStyle/>
+            <a:p>
+              <a:r>
+                <a:rPr lang="ja-JP"/>
+                <a:t>得意先 EDI</a:t>
+              </a:r>
+              <a:br/>
+              <a:r>
+                <a:rPr lang="ja-JP"/>
+                <a:t>（全銀手順）</a:t>
+              </a:r>
+            </a:p>
+          </p:txBody>
+        </p:sp>
+        <p:sp>
+          <p:nvSpPr>
+            <p:cNvPr id="15" name="物流センター"/>
+            <p:cNvSpPr>
+              <a:spLocks noGrp="1"/>
+            </p:cNvSpPr>
+            <p:nvPr/>
+          </p:nvSpPr>
+          <p:spPr>
+            <a:xfrm>
+              <a:off x="3400000" y="5100000"/>
+              <a:ext cx="2200000" cy="900000"/>
+            </a:xfrm>
+            <a:prstGeom prst="rect">
+              <a:avLst/>
+            </a:prstGeom>
+          </p:spPr>
+          <p:txBody>
+            <a:bodyPr/>
+            <a:lstStyle/>
+            <a:p>
+              <a:r>
+                <a:rPr lang="ja-JP"/>
+                <a:t>物流センター</a:t>
+              </a:r>
+            </a:p>
+          </p:txBody>
+        </p:sp>
+        <p:sp>
+          <p:nvSpPr>
+            <p:cNvPr id="16" name="銀行伝送"/>
+            <p:cNvSpPr>
+              <a:spLocks noGrp="1"/>
+            </p:cNvSpPr>
+            <p:nvPr/>
+          </p:nvSpPr>
+          <p:spPr>
+            <a:xfrm>
+              <a:off x="6100000" y="5100000"/>
+              <a:ext cx="2200000" cy="900000"/>
+            </a:xfrm>
+            <a:prstGeom prst="rect">
+              <a:avLst/>
+            </a:prstGeom>
+          </p:spPr>
+          <p:txBody>
+            <a:bodyPr/>
+            <a:lstStyle/>
+            <a:p>
+              <a:r>
+                <a:rPr lang="ja-JP"/>
+                <a:t>銀行ファイル伝送</a:t>
+              </a:r>
+            </a:p>
+          </p:txBody>
+        </p:sp>
+        <p:sp>
+          <p:nvSpPr>
+            <p:cNvPr id="17" name="会計パッケージ"/>
+            <p:cNvSpPr>
+              <a:spLocks noGrp="1"/>
+            </p:cNvSpPr>
+            <p:nvPr/>
+          </p:nvSpPr>
+          <p:spPr>
+            <a:xfrm>
+              <a:off x="8800000" y="5100000"/>
+              <a:ext cx="2200000" cy="900000"/>
+            </a:xfrm>
+            <a:prstGeom prst="rect">
+              <a:avLst/>
+            </a:prstGeom>
+          </p:spPr>
+          <p:txBody>
+            <a:bodyPr/>
+            <a:lstStyle/>
+            <a:p>
+              <a:r>
+                <a:rPr lang="ja-JP"/>
+                <a:t>会計パッケージ</a:t>
+              </a:r>
+            </a:p>
+          </p:txBody>
+        </p:sp>
+      </p:grpSp>
+      <p:cxnSp>
+        <p:nvCxnSpPr>
+          <p:cNvPr id="18" name="受注データ"/>
+          <p:cNvCxnSpPr>
+            <a:stCxn id="14" idx="3"/>
+            <a:endCxn id="4" idx="1"/>
+          </p:cNvCxnSpPr>
+          <p:nvPr/>
+        </p:nvCxnSpPr>
+        <p:spPr>
+          <a:xfrm>
+            <a:off x="700000" y="1900000"/>
+            <a:ext cx="2200000" cy="0"/>
+          </a:xfrm>
+          <a:prstGeom prst="straightConnector1">
+            <a:avLst/>
+          </a:prstGeom>
+          <a:ln w="12700">
+            <a:prstDash val="solid"/>
+            <a:headEnd type="none"/>
+            <a:tailEnd type="triangle"/>
+          </a:ln>
+        </p:spPr>
+      </p:cxnSp>
+      <p:cxnSp>
+        <p:nvCxnSpPr>
+          <p:cNvPr id="19" name="同期"/>
+          <p:cNvCxnSpPr>
+            <a:stCxn id="4" idx="3"/>
+            <a:endCxn id="5" idx="1"/>
+          </p:cNvCxnSpPr>
+          <p:nvPr/>
+        </p:nvCxnSpPr>
+        <p:spPr>
+          <a:xfrm>
+            <a:off x="700000" y="1900000"/>
+            <a:ext cx="2200000" cy="0"/>
+          </a:xfrm>
+          <a:prstGeom prst="straightConnector1">
+            <a:avLst/>
+          </a:prstGeom>
+          <a:ln w="12700">
+            <a:prstDash val="solid"/>
+            <a:headEnd type="none"/>
+            <a:tailEnd type="triangle"/>
+          </a:ln>
+        </p:spPr>
+      </p:cxnSp>
+      <p:cxnSp>
+        <p:nvCxnSpPr>
+          <p:cNvPr id="20" name="同期"/>
+          <p:cNvCxnSpPr>
+            <a:stCxn id="5" idx="3"/>
+            <a:endCxn id="6" idx="1"/>
+          </p:cNvCxnSpPr>
+          <p:nvPr/>
+        </p:nvCxnSpPr>
+        <p:spPr>
+          <a:xfrm>
+            <a:off x="700000" y="1900000"/>
+            <a:ext cx="2200000" cy="0"/>
+          </a:xfrm>
+          <a:prstGeom prst="straightConnector1">
+            <a:avLst/>
+          </a:prstGeom>
+          <a:ln w="12700">
+            <a:prstDash val="solid"/>
+            <a:headEnd type="none"/>
+            <a:tailEnd type="triangle"/>
+          </a:ln>
+        </p:spPr>
+      </p:cxnSp>
+      <p:cxnSp>
+        <p:nvCxnSpPr>
+          <p:cNvPr id="21" name="同期"/>
+          <p:cNvCxnSpPr>
+            <a:stCxn id="6" idx="3"/>
+            <a:endCxn id="7" idx="1"/>
+          </p:cNvCxnSpPr>
+          <p:nvPr/>
+        </p:nvCxnSpPr>
+        <p:spPr>
+          <a:xfrm>
+            <a:off x="700000" y="1900000"/>
+            <a:ext cx="2200000" cy="0"/>
+          </a:xfrm>
+          <a:prstGeom prst="straightConnector1">
+            <a:avLst/>
+          </a:prstGeom>
+          <a:ln w="12700">
+            <a:prstDash val="solid"/>
+            <a:headEnd type="none"/>
+            <a:tailEnd type="triangle"/>
+          </a:ln>
+        </p:spPr>
+      </p:cxnSp>
+      <p:cxnSp>
+        <p:nvCxnSpPr>
+          <p:cNvPr id="22" name="出荷指示データ"/>
+          <p:cNvCxnSpPr>
+            <a:stCxn id="7" idx="3"/>
+            <a:endCxn id="15" idx="1"/>
+          </p:cNvCxnSpPr>
+          <p:nvPr/>
+        </p:nvCxnSpPr>
+        <p:spPr>
+          <a:xfrm>
+            <a:off x="700000" y="1900000"/>
+            <a:ext cx="2200000" cy="0"/>
+          </a:xfrm>
+          <a:prstGeom prst="straightConnector1">
+            <a:avLst/>
+          </a:prstGeom>
+          <a:ln w="12700">
+            <a:prstDash val="solid"/>
+            <a:headEnd type="none"/>
+            <a:tailEnd type="triangle"/>
+          </a:ln>
+        </p:spPr>
+      </p:cxnSp>
+      <p:cxnSp>
+        <p:nvCxnSpPr>
+          <p:cNvPr id="23" name="夜間バッチ"/>
+          <p:cNvCxnSpPr>
+            <a:stCxn id="7" idx="3"/>
+            <a:endCxn id="9" idx="1"/>
+          </p:cNvCxnSpPr>
+          <p:nvPr/>
+        </p:nvCxnSpPr>
+        <p:spPr>
+          <a:xfrm>
+            <a:off x="700000" y="1900000"/>
+            <a:ext cx="2200000" cy="0"/>
+          </a:xfrm>
+          <a:prstGeom prst="straightConnector1">
+            <a:avLst/>
+          </a:prstGeom>
+          <a:ln w="12700">
+            <a:prstDash val="dash"/>
+            <a:headEnd type="none"/>
+            <a:tailEnd type="triangle"/>
+          </a:ln>
+        </p:spPr>
+      </p:cxnSp>
+      <p:cxnSp>
+        <p:nvCxnSpPr>
+          <p:cNvPr id="24" name="月次"/>
+          <p:cNvCxnSpPr>
+            <a:stCxn id="9" idx="3"/>
+            <a:endCxn id="10" idx="1"/>
+          </p:cNvCxnSpPr>
+          <p:nvPr/>
+        </p:nvCxnSpPr>
+        <p:spPr>
+          <a:xfrm>
+            <a:off x="700000" y="1900000"/>
+            <a:ext cx="2200000" cy="0"/>
+          </a:xfrm>
+          <a:prstGeom prst="straightConnector1">
+            <a:avLst/>
+          </a:prstGeom>
+          <a:ln w="12700">
+            <a:prstDash val="dash"/>
+            <a:headEnd type="none"/>
+            <a:tailEnd type="triangle"/>
+          </a:ln>
+        </p:spPr>
+      </p:cxnSp>
+      <p:cxnSp>
+        <p:nvCxnSpPr>
+          <p:cNvPr id="25" name="月次"/>
+          <p:cNvCxnSpPr>
+            <a:stCxn id="10" idx="3"/>
+            <a:endCxn id="11" idx="1"/>
+          </p:cNvCxnSpPr>
+          <p:nvPr/>
+        </p:nvCxnSpPr>
+        <p:spPr>
+          <a:xfrm>
+            <a:off x="700000" y="1900000"/>
+            <a:ext cx="2200000" cy="0"/>
+          </a:xfrm>
+          <a:prstGeom prst="straightConnector1">
+            <a:avLst/>
+          </a:prstGeom>
+          <a:ln w="12700">
+            <a:prstDash val="dash"/>
+            <a:headEnd type="none"/>
+            <a:tailEnd type="triangle"/>
+          </a:ln>
+        </p:spPr>
+      </p:cxnSp>
+      <p:cxnSp>
+        <p:nvCxnSpPr>
+          <p:cNvPr id="26" name="口座振替"/>
+          <p:cNvCxnSpPr>
+            <a:stCxn id="10" idx="3"/>
+            <a:endCxn id="16" idx="1"/>
+          </p:cNvCxnSpPr>
+          <p:nvPr/>
+        </p:nvCxnSpPr>
+        <p:spPr>
+          <a:xfrm>
+            <a:off x="700000" y="1900000"/>
+            <a:ext cx="2200000" cy="0"/>
+          </a:xfrm>
+          <a:prstGeom prst="straightConnector1">
+            <a:avLst/>
+          </a:prstGeom>
+          <a:ln w="12700">
+            <a:prstDash val="dash"/>
+            <a:headEnd type="none"/>
+            <a:tailEnd type="triangle"/>
+          </a:ln>
+        </p:spPr>
+      </p:cxnSp>
+      <p:cxnSp>
+        <p:nvCxnSpPr>
+          <p:cNvPr id="27" name="仕訳連携"/>
+          <p:cNvCxnSpPr>
+            <a:stCxn id="11" idx="3"/>
+            <a:endCxn id="17" idx="1"/>
+          </p:cNvCxnSpPr>
+          <p:nvPr/>
+        </p:nvCxnSpPr>
+        <p:spPr>
+          <a:xfrm>
+            <a:off x="700000" y="1900000"/>
+            <a:ext cx="2200000" cy="0"/>
+          </a:xfrm>
+          <a:prstGeom prst="straightConnector1">
+            <a:avLst/>
+          </a:prstGeom>
+          <a:ln w="12700">
+            <a:prstDash val="dash"/>
+            <a:headEnd type="none"/>
+            <a:tailEnd type="triangle"/>
+          </a:ln>
+        </p:spPr>
+      </p:cxnSp>
+      <p:cxnSp>
+        <p:nvCxnSpPr>
+          <p:cNvPr id="28" name="凡例の矢印"/>
+          <p:cNvCxnSpPr/>
+          <p:nvPr/>
+        </p:nvCxnSpPr>
+        <p:spPr>
+          <a:xfrm>
+            <a:off x="700000" y="1900000"/>
+            <a:ext cx="2200000" cy="0"/>
+          </a:xfrm>
+          <a:prstGeom prst="straightConnector1">
+            <a:avLst/>
+          </a:prstGeom>
+          <a:ln w="12700">
+            <a:prstDash val="solid"/>
+            <a:headEnd type="none"/>
+            <a:tailEnd type="triangle"/>
+          </a:ln>
+        </p:spPr>
+      </p:cxnSp>
+    </p:spTree>
+  </p:cSld>
+</p:sld>
+</file>
+
+<file path=ppt/slides/slide5.xml><?xml version="1.0" encoding="utf-8"?>
+<p:sld xmlns:a="http://schemas.openxmlformats.org/drawingml/2006/main" xmlns:r="http://schemas.openxmlformats.org/officeDocument/2006/relationships" xmlns:p="http://schemas.openxmlformats.org/presentationml/2006/main">
+  <p:cSld>
+    <p:spTree>
+      <p:nvGrpSpPr>
+        <p:cNvPr id="1" name=""/>
+        <p:cNvGrpSpPr/>
+        <p:nvPr/>
+      </p:nvGrpSpPr>
+      <p:grpSpPr/>
+      <p:sp>
+        <p:nvSpPr>
+          <p:cNvPr id="2" name="タイトル 1"/>
+          <p:cNvSpPr>
+            <a:spLocks noGrp="1"/>
+          </p:cNvSpPr>
+          <p:nvPr>
+            <p:ph type="title"/>
+          </p:nvPr>
+        </p:nvSpPr>
+        <p:spPr>
+          <a:xfrm>
+            <a:off x="700000" y="500000"/>
+            <a:ext cx="10792000" cy="1000000"/>
+          </a:xfrm>
+          <a:prstGeom prst="rect">
+            <a:avLst/>
+          </a:prstGeom>
+        </p:spPr>
+        <p:txBody>
+          <a:bodyPr/>
+          <a:lstStyle/>
+          <a:p>
+            <a:r>
+              <a:rPr lang="ja-JP"/>
+              <a:t>現行の受注入力画面（ハードコピー）</a:t>
+            </a:r>
+          </a:p>
+        </p:txBody>
+      </p:sp>
+      <p:pic>
+        <p:nvPicPr>
+          <p:cNvPr id="3" name="現行画面" descr="現行の受注入力画面。項目名は別紙 2 の項目定義書による"/>
+          <p:cNvPicPr>
+            <a:picLocks noChangeAspect="1"/>
+          </p:cNvPicPr>
+          <p:nvPr/>
+        </p:nvPicPr>
+        <p:blipFill>
+          <a:blip r:embed="rIdImg5_1"/>
+          <a:stretch>
+            <a:fillRect/>
+          </a:stretch>
+        </p:blipFill>
+        <p:spPr>
+          <a:xfrm>
+            <a:off x="700000" y="1900000"/>
+            <a:ext cx="2200000" cy="900000"/>
+          </a:xfrm>
+          <a:prstGeom prst="rect">
+            <a:avLst/>
+          </a:prstGeom>
+        </p:spPr>
+      </p:pic>
+    </p:spTree>
+  </p:cSld>
+</p:sld>
+</file>
+
+<file path=ppt/slides/slide6.xml><?xml version="1.0" encoding="utf-8"?>
+<p:sld xmlns:a="http://schemas.openxmlformats.org/drawingml/2006/main" xmlns:r="http://schemas.openxmlformats.org/officeDocument/2006/relationships" xmlns:p="http://schemas.openxmlformats.org/presentationml/2006/main">
+  <p:cSld>
+    <p:spTree>
+      <p:nvGrpSpPr>
+        <p:cNvPr id="1" name=""/>
+        <p:cNvGrpSpPr/>
+        <p:nvPr/>
+      </p:nvGrpSpPr>
+      <p:grpSpPr/>
+      <p:sp>
+        <p:nvSpPr>
+          <p:cNvPr id="2" name="タイトル 1"/>
+          <p:cNvSpPr>
+            <a:spLocks noGrp="1"/>
+          </p:cNvSpPr>
+          <p:nvPr>
+            <p:ph type="title"/>
+          </p:nvPr>
+        </p:nvSpPr>
+        <p:spPr>
+          <a:xfrm>
+            <a:off x="700000" y="500000"/>
+            <a:ext cx="10792000" cy="1000000"/>
+          </a:xfrm>
+          <a:prstGeom prst="rect">
+            <a:avLst/>
+          </a:prstGeom>
+        </p:spPr>
+        <p:txBody>
+          <a:bodyPr/>
+          <a:lstStyle/>
+          <a:p>
+            <a:r>
+              <a:rPr lang="ja-JP"/>
+              <a:t>フェーズ計画と主要マイルストーン</a:t>
+            </a:r>
+          </a:p>
+        </p:txBody>
+      </p:sp>
+      <p:graphicFrame>
+        <p:nvGraphicFramePr>
+          <p:cNvPr id="3" name="表 3"/>
+          <p:cNvGraphicFramePr/>
+          <p:nvPr/>
+        </p:nvGraphicFramePr>
+        <p:xfrm>
+          <a:off x="700000" y="1900000"/>
+          <a:ext cx="10792000" cy="2960000"/>
+        </p:xfrm>
+        <a:graphic>
+          <a:graphicData uri="http://schemas.openxmlformats.org/drawingml/2006/main/table">
+            <a:tbl>
+              <a:tblPr/>
+              <a:tblGrid>
+                <a:gridCol w="2158400"/>
+                <a:gridCol w="2158400"/>
+                <a:gridCol w="2158400"/>
+                <a:gridCol w="2158400"/>
+                <a:gridCol w="2158400"/>
+              </a:tblGrid>
+              <a:tr h="370000">
+                <a:tc>
+                  <a:txBody>
+                    <a:bodyPr/>
+                    <a:lstStyle/>
+                    <a:p>
+                      <a:r>
+                        <a:rPr lang="ja-JP"/>
+                        <a:t>フェーズ</a:t>
+                      </a:r>
+                    </a:p>
+                  </a:txBody>
+                  <a:tcPr/>
+                </a:tc>
+                <a:tc>
+                  <a:txBody>
+                    <a:bodyPr/>
+                    <a:lstStyle/>
+                    <a:p>
+                      <a:r>
+                        <a:rPr lang="ja-JP"/>
+                        <a:t>工程</a:t>
+                      </a:r>
+                    </a:p>
+                  </a:txBody>
+                  <a:tcPr/>
+                </a:tc>
+                <a:tc>
+                  <a:txBody>
+                    <a:bodyPr/>
+                    <a:lstStyle/>
+                    <a:p>
+                      <a:r>
+                        <a:rPr lang="ja-JP"/>
+                        <a:t>期間</a:t>
+                      </a:r>
+                    </a:p>
+                  </a:txBody>
+                  <a:tcPr/>
+                </a:tc>
+                <a:tc>
+                  <a:txBody>
+                    <a:bodyPr/>
+                    <a:lstStyle/>
+                    <a:p>
+                      <a:r>
+                        <a:rPr lang="ja-JP"/>
+                        <a:t>主要成果物</a:t>
+                      </a:r>
+                    </a:p>
+                  </a:txBody>
+                  <a:tcPr/>
+                </a:tc>
+                <a:tc>
+                  <a:txBody>
+                    <a:bodyPr/>
+                    <a:lstStyle/>
+                    <a:p>
+                      <a:r>
+                        <a:rPr lang="ja-JP"/>
+                        <a:t>判定会議</a:t>
+                      </a:r>
+                    </a:p>
+                  </a:txBody>
+                  <a:tcPr/>
+                </a:tc>
+              </a:tr>
+              <a:tr h="370000">
+                <a:tc>
+                  <a:txBody>
+                    <a:bodyPr/>
+                    <a:lstStyle/>
+                    <a:p>
+                      <a:r>
+                        <a:rPr lang="ja-JP"/>
+                        <a:t>第 1 次</a:t>
+                      </a:r>
+                    </a:p>
+                  </a:txBody>
+                  <a:tcPr/>
+                </a:tc>
+                <a:tc>
+                  <a:txBody>
+                    <a:bodyPr/>
+                    <a:lstStyle/>
+                    <a:p>
+                      <a:r>
+                        <a:rPr lang="ja-JP"/>
+                        <a:t>要件定義</a:t>
+                      </a:r>
+                    </a:p>
+                  </a:txBody>
+                  <a:tcPr/>
+                </a:tc>
+                <a:tc>
+                  <a:txBody>
+                    <a:bodyPr/>
+                    <a:lstStyle/>
+                    <a:p>
+                      <a:r>
+                        <a:rPr lang="ja-JP"/>
+                        <a:t>2026-09〜2026-11</a:t>
+                      </a:r>
+                    </a:p>
+                  </a:txBody>
+                  <a:tcPr/>
+                </a:tc>
+                <a:tc>
+                  <a:txBody>
+                    <a:bodyPr/>
+                    <a:lstStyle/>
+                    <a:p>
+                      <a:r>
+                        <a:rPr lang="ja-JP"/>
+                        <a:t>要件定義書</a:t>
+                      </a:r>
+                    </a:p>
+                  </a:txBody>
+                  <a:tcPr/>
+                </a:tc>
+                <a:tc>
+                  <a:txBody>
+                    <a:bodyPr/>
+                    <a:lstStyle/>
+                    <a:p>
+                      <a:r>
+                        <a:rPr lang="ja-JP"/>
+                        <a:t>要件確定会議</a:t>
+                      </a:r>
+                    </a:p>
+                  </a:txBody>
+                  <a:tcPr/>
+                </a:tc>
+              </a:tr>
+              <a:tr h="370000">
+                <a:tc vMerge="1">
+                  <a:txBody>
+                    <a:bodyPr/>
+                    <a:lstStyle/>
+                    <a:p>
+                      <a:r>
+                        <a:rPr lang="ja-JP"/>
+                        <a:t/>
+                      </a:r>
+                    </a:p>
+                  </a:txBody>
+                  <a:tcPr/>
+                </a:tc>
+                <a:tc>
+                  <a:txBody>
+                    <a:bodyPr/>
+                    <a:lstStyle/>
+                    <a:p>
+                      <a:r>
+                        <a:rPr lang="ja-JP"/>
+                        <a:t>基本設計</a:t>
+                      </a:r>
+                    </a:p>
+                  </a:txBody>
+                  <a:tcPr/>
+                </a:tc>
+                <a:tc>
+                  <a:txBody>
+                    <a:bodyPr/>
+                    <a:lstStyle/>
+                    <a:p>
+                      <a:r>
+                        <a:rPr lang="ja-JP"/>
+                        <a:t>2026-12〜2027-02</a:t>
+                      </a:r>
+                    </a:p>
+                  </a:txBody>
+                  <a:tcPr/>
+                </a:tc>
+                <a:tc>
+                  <a:txBody>
+                    <a:bodyPr/>
+                    <a:lstStyle/>
+                    <a:p>
+                      <a:r>
+                        <a:rPr lang="ja-JP"/>
+                        <a:t>基本設計書</a:t>
+                      </a:r>
+                    </a:p>
+                  </a:txBody>
+                  <a:tcPr/>
+                </a:tc>
+                <a:tc>
+                  <a:txBody>
+                    <a:bodyPr/>
+                    <a:lstStyle/>
+                    <a:p>
+                      <a:r>
+                        <a:rPr lang="ja-JP"/>
+                        <a:t>基本設計完了判定</a:t>
+                      </a:r>
+                    </a:p>
+                  </a:txBody>
+                  <a:tcPr/>
+                </a:tc>
+              </a:tr>
+              <a:tr h="370000">
+                <a:tc vMerge="1">
+                  <a:txBody>
+                    <a:bodyPr/>
+                    <a:lstStyle/>
+                    <a:p>
+                      <a:r>
+                        <a:rPr lang="ja-JP"/>
+                        <a:t/>
+                      </a:r>
+                    </a:p>
+                  </a:txBody>
+                  <a:tcPr/>
+                </a:tc>
+                <a:tc>
+                  <a:txBody>
+                    <a:bodyPr/>
+                    <a:lstStyle/>
+                    <a:p>
+                      <a:r>
+                        <a:rPr lang="ja-JP"/>
+                        <a:t>詳細設計</a:t>
+                      </a:r>
+                    </a:p>
+                  </a:txBody>
+                  <a:tcPr/>
+                </a:tc>
+                <a:tc>
+                  <a:txBody>
+                    <a:bodyPr/>
+                    <a:lstStyle/>
+                    <a:p>
+                      <a:r>
+                        <a:rPr lang="ja-JP"/>
+                        <a:t>2027-03〜2027-05</a:t>
+                      </a:r>
+                    </a:p>
+                  </a:txBody>
+                  <a:tcPr/>
+                </a:tc>
+                <a:tc>
+                  <a:txBody>
+                    <a:bodyPr/>
+                    <a:lstStyle/>
+                    <a:p>
+                      <a:r>
+                        <a:rPr lang="ja-JP"/>
+                        <a:t>詳細設計書</a:t>
+                      </a:r>
+                    </a:p>
+                  </a:txBody>
+                  <a:tcPr/>
+                </a:tc>
+                <a:tc>
+                  <a:txBody>
+                    <a:bodyPr/>
+                    <a:lstStyle/>
+                    <a:p>
+                      <a:r>
+                        <a:rPr lang="ja-JP"/>
+                        <a:t/>
+                      </a:r>
+                    </a:p>
+                  </a:txBody>
+                  <a:tcPr/>
+                </a:tc>
+              </a:tr>
+              <a:tr h="370000">
+                <a:tc>
+                  <a:txBody>
+                    <a:bodyPr/>
+                    <a:lstStyle/>
+                    <a:p>
+                      <a:r>
+                        <a:rPr lang="ja-JP"/>
+                        <a:t>第 2 次</a:t>
+                      </a:r>
+                    </a:p>
+                  </a:txBody>
+                  <a:tcPr/>
+                </a:tc>
+                <a:tc>
+                  <a:txBody>
+                    <a:bodyPr/>
+                    <a:lstStyle/>
+                    <a:p>
+                      <a:r>
+                        <a:rPr lang="ja-JP"/>
+                        <a:t>製造・単体</a:t>
+                      </a:r>
+                    </a:p>
+                  </a:txBody>
+                  <a:tcPr/>
+                </a:tc>
+                <a:tc>
+                  <a:txBody>
+                    <a:bodyPr/>
+                    <a:lstStyle/>
+                    <a:p>
+                      <a:r>
+                        <a:rPr lang="ja-JP"/>
+                        <a:t>2027-06〜2027-10</a:t>
+                      </a:r>
+                    </a:p>
+                  </a:txBody>
+                  <a:tcPr/>
+                </a:tc>
+                <a:tc>
+                  <a:txBody>
+                    <a:bodyPr/>
+                    <a:lstStyle/>
+                    <a:p>
+                      <a:r>
+                        <a:rPr lang="ja-JP"/>
+                        <a:t>単体試験報告書</a:t>
+                      </a:r>
+                    </a:p>
+                  </a:txBody>
+                  <a:tcPr/>
+                </a:tc>
+                <a:tc>
+                  <a:txBody>
+                    <a:bodyPr/>
+                    <a:lstStyle/>
+                    <a:p>
+                      <a:r>
+                        <a:rPr lang="ja-JP"/>
+                        <a:t/>
+                      </a:r>
+                    </a:p>
+                  </a:txBody>
+                  <a:tcPr/>
+                </a:tc>
+              </a:tr>
+              <a:tr h="370000">
+                <a:tc vMerge="1">
+                  <a:txBody>
+                    <a:bodyPr/>
+                    <a:lstStyle/>
+                    <a:p>
+                      <a:r>
+                        <a:rPr lang="ja-JP"/>
+                        <a:t/>
+                      </a:r>
+                    </a:p>
+                  </a:txBody>
+                  <a:tcPr/>
+                </a:tc>
+                <a:tc>
+                  <a:txBody>
+                    <a:bodyPr/>
+                    <a:lstStyle/>
+                    <a:p>
+                      <a:r>
+                        <a:rPr lang="ja-JP"/>
+                        <a:t>結合試験</a:t>
+                      </a:r>
+                    </a:p>
+                  </a:txBody>
+                  <a:tcPr/>
+                </a:tc>
+                <a:tc>
+                  <a:txBody>
+                    <a:bodyPr/>
+                    <a:lstStyle/>
+                    <a:p>
+                      <a:r>
+                        <a:rPr lang="ja-JP"/>
+                        <a:t>2027-11〜2028-01</a:t>
+                      </a:r>
+                    </a:p>
+                  </a:txBody>
+                  <a:tcPr/>
+                </a:tc>
+                <a:tc>
+                  <a:txBody>
+                    <a:bodyPr/>
+                    <a:lstStyle/>
+                    <a:p>
+                      <a:r>
+                        <a:rPr lang="ja-JP"/>
+                        <a:t>結合試験報告書</a:t>
+                      </a:r>
+                    </a:p>
+                  </a:txBody>
+                  <a:tcPr/>
+                </a:tc>
+                <a:tc>
+                  <a:txBody>
+                    <a:bodyPr/>
+                    <a:lstStyle/>
+                    <a:p>
+                      <a:r>
+                        <a:rPr lang="ja-JP"/>
+                        <a:t>結合試験完了判定</a:t>
+                      </a:r>
+                    </a:p>
+                  </a:txBody>
+                  <a:tcPr/>
+                </a:tc>
+              </a:tr>
+              <a:tr h="370000">
+                <a:tc vMerge="1">
+                  <a:txBody>
+                    <a:bodyPr/>
+                    <a:lstStyle/>
+                    <a:p>
+                      <a:r>
+                        <a:rPr lang="ja-JP"/>
+                        <a:t/>
+                      </a:r>
+                    </a:p>
+                  </a:txBody>
+                  <a:tcPr/>
+                </a:tc>
+                <a:tc>
+                  <a:txBody>
+                    <a:bodyPr/>
+                    <a:lstStyle/>
+                    <a:p>
+                      <a:r>
+                        <a:rPr lang="ja-JP"/>
+                        <a:t>総合試験</a:t>
+                      </a:r>
+                    </a:p>
+                  </a:txBody>
+                  <a:tcPr/>
+                </a:tc>
+                <a:tc>
+                  <a:txBody>
+                    <a:bodyPr/>
+                    <a:lstStyle/>
+                    <a:p>
+                      <a:r>
+                        <a:rPr lang="ja-JP"/>
+                        <a:t>2028-02〜2028-04</a:t>
+                      </a:r>
+                    </a:p>
+                  </a:txBody>
+                  <a:tcPr/>
+                </a:tc>
+                <a:tc>
+                  <a:txBody>
+                    <a:bodyPr/>
+                    <a:lstStyle/>
+                    <a:p>
+                      <a:r>
+                        <a:rPr lang="ja-JP"/>
+                        <a:t>総合試験報告書</a:t>
+                      </a:r>
+                    </a:p>
+                  </a:txBody>
+                  <a:tcPr/>
+                </a:tc>
+                <a:tc>
+                  <a:txBody>
+                    <a:bodyPr/>
+                    <a:lstStyle/>
+                    <a:p>
+                      <a:r>
+                        <a:rPr lang="ja-JP"/>
+                        <a:t>移行判定会議</a:t>
+                      </a:r>
+                    </a:p>
+                  </a:txBody>
+                  <a:tcPr/>
+                </a:tc>
+              </a:tr>
+              <a:tr h="370000">
+                <a:tc>
+                  <a:txBody>
+                    <a:bodyPr/>
+                    <a:lstStyle/>
+                    <a:p>
+                      <a:r>
+                        <a:rPr lang="ja-JP"/>
+                        <a:t>第 3 次</a:t>
+                      </a:r>
+                    </a:p>
+                  </a:txBody>
+                  <a:tcPr/>
+                </a:tc>
+                <a:tc>
+                  <a:txBody>
+                    <a:bodyPr/>
+                    <a:lstStyle/>
+                    <a:p>
+                      <a:r>
+                        <a:rPr lang="ja-JP"/>
+                        <a:t>移行・稼働</a:t>
+                      </a:r>
+                    </a:p>
+                  </a:txBody>
+                  <a:tcPr/>
+                </a:tc>
+                <a:tc>
+                  <a:txBody>
+                    <a:bodyPr/>
+                    <a:lstStyle/>
+                    <a:p>
+                      <a:r>
+                        <a:rPr lang="ja-JP"/>
+                        <a:t>2028-05〜2028-06</a:t>
+                      </a:r>
+                    </a:p>
+                  </a:txBody>
+                  <a:tcPr/>
+                </a:tc>
+                <a:tc>
+                  <a:txBody>
+                    <a:bodyPr/>
+                    <a:lstStyle/>
+                    <a:p>
+                      <a:r>
+                        <a:rPr lang="ja-JP"/>
+                        <a:t>移行手順書</a:t>
+                      </a:r>
+                    </a:p>
+                  </a:txBody>
+                  <a:tcPr/>
+                </a:tc>
+                <a:tc>
+                  <a:txBody>
+                    <a:bodyPr/>
+                    <a:lstStyle/>
+                    <a:p>
+                      <a:r>
+                        <a:rPr lang="ja-JP"/>
+                        <a:t>稼働判定会議</a:t>
+                      </a:r>
+                    </a:p>
+                  </a:txBody>
+                  <a:tcPr/>
+                </a:tc>
+              </a:tr>
+            </a:tbl>
+          </a:graphicData>
+        </a:graphic>
+      </p:graphicFrame>
+    </p:spTree>
+  </p:cSld>
+</p:sld>
+</file>
+
+<file path=ppt/slides/slide7.xml><?xml version="1.0" encoding="utf-8"?>
+<p:sld xmlns:a="http://schemas.openxmlformats.org/drawingml/2006/main" xmlns:r="http://schemas.openxmlformats.org/officeDocument/2006/relationships" xmlns:p="http://schemas.openxmlformats.org/presentationml/2006/main">
+  <p:cSld>
+    <p:spTree>
+      <p:nvGrpSpPr>
+        <p:cNvPr id="1" name=""/>
+        <p:cNvGrpSpPr/>
+        <p:nvPr/>
+      </p:nvGrpSpPr>
+      <p:grpSpPr/>
+      <p:sp>
+        <p:nvSpPr>
+          <p:cNvPr id="2" name="タイトル 1"/>
+          <p:cNvSpPr>
+            <a:spLocks noGrp="1"/>
+          </p:cNvSpPr>
+          <p:nvPr>
+            <p:ph type="title"/>
+          </p:nvPr>
+        </p:nvSpPr>
+        <p:spPr>
+          <a:xfrm>
+            <a:off x="700000" y="500000"/>
+            <a:ext cx="10792000" cy="1000000"/>
+          </a:xfrm>
+          <a:prstGeom prst="rect">
+            <a:avLst/>
+          </a:prstGeom>
+        </p:spPr>
+        <p:txBody>
+          <a:bodyPr/>
+          <a:lstStyle/>
+          <a:p>
+            <a:r>
+              <a:rPr lang="ja-JP"/>
+              <a:t>移行方式の比較</a:t>
+            </a:r>
+          </a:p>
+        </p:txBody>
+      </p:sp>
+      <p:graphicFrame>
+        <p:nvGraphicFramePr>
+          <p:cNvPr id="3" name="表 3"/>
+          <p:cNvGraphicFramePr/>
+          <p:nvPr/>
+        </p:nvGraphicFramePr>
+        <p:xfrm>
+          <a:off x="700000" y="1900000"/>
+          <a:ext cx="10792000" cy="1480000"/>
+        </p:xfrm>
+        <a:graphic>
+          <a:graphicData uri="http://schemas.openxmlformats.org/drawingml/2006/main/table">
+            <a:tbl>
+              <a:tblPr/>
+              <a:tblGrid>
+                <a:gridCol w="2158400"/>
+                <a:gridCol w="2158400"/>
+                <a:gridCol w="2158400"/>
+                <a:gridCol w="2158400"/>
+                <a:gridCol w="2158400"/>
+              </a:tblGrid>
+              <a:tr h="370000">
+                <a:tc>
+                  <a:txBody>
+                    <a:bodyPr/>
+                    <a:lstStyle/>
+                    <a:p>
+                      <a:r>
+                        <a:rPr lang="ja-JP"/>
+                        <a:t>方式</a:t>
+                      </a:r>
+                    </a:p>
+                  </a:txBody>
+                  <a:tcPr/>
+                </a:tc>
+                <a:tc>
+                  <a:txBody>
+                    <a:bodyPr/>
+                    <a:lstStyle/>
+                    <a:p>
+                      <a:r>
+                        <a:rPr lang="ja-JP"/>
+                        <a:t>停止時間</a:t>
+                      </a:r>
+                    </a:p>
+                  </a:txBody>
+                  <a:tcPr/>
+                </a:tc>
+                <a:tc>
+                  <a:txBody>
+                    <a:bodyPr/>
+                    <a:lstStyle/>
+                    <a:p>
+                      <a:r>
+                        <a:rPr lang="ja-JP"/>
+                        <a:t>切戻し</a:t>
+                      </a:r>
+                    </a:p>
+                  </a:txBody>
+                  <a:tcPr/>
+                </a:tc>
+                <a:tc>
+                  <a:txBody>
+                    <a:bodyPr/>
+                    <a:lstStyle/>
+                    <a:p>
+                      <a:r>
+                        <a:rPr lang="ja-JP"/>
+                        <a:t>費用</a:t>
+                      </a:r>
+                    </a:p>
+                  </a:txBody>
+                  <a:tcPr/>
+                </a:tc>
+                <a:tc>
+                  <a:txBody>
+                    <a:bodyPr/>
+                    <a:lstStyle/>
+                    <a:p>
+                      <a:r>
+                        <a:rPr lang="ja-JP"/>
+                        <a:t>評価</a:t>
+                      </a:r>
+                    </a:p>
+                  </a:txBody>
+                  <a:tcPr/>
+                </a:tc>
+              </a:tr>
+              <a:tr h="370000">
+                <a:tc>
+                  <a:txBody>
+                    <a:bodyPr/>
+                    <a:lstStyle/>
+                    <a:p>
+                      <a:r>
+                        <a:rPr lang="ja-JP"/>
+                        <a:t>一括移行</a:t>
+                      </a:r>
+                    </a:p>
+                  </a:txBody>
+                  <a:tcPr/>
+                </a:tc>
+                <a:tc>
+                  <a:txBody>
+                    <a:bodyPr/>
+                    <a:lstStyle/>
+                    <a:p>
+                      <a:r>
+                        <a:rPr lang="ja-JP"/>
+                        <a:t>48 時間</a:t>
+                      </a:r>
+                    </a:p>
+                  </a:txBody>
+                  <a:tcPr/>
+                </a:tc>
+                <a:tc>
+                  <a:txBody>
+                    <a:bodyPr/>
+                    <a:lstStyle/>
+                    <a:p>
+                      <a:r>
+                        <a:rPr lang="ja-JP"/>
+                        <a:t>可（12 時間）</a:t>
+                      </a:r>
+                    </a:p>
+                  </a:txBody>
+                  <a:tcPr/>
+                </a:tc>
+                <a:tc>
+                  <a:txBody>
+                    <a:bodyPr/>
+                    <a:lstStyle/>
+                    <a:p>
+                      <a:r>
+                        <a:rPr lang="ja-JP"/>
+                        <a:t>低</a:t>
+                      </a:r>
+                    </a:p>
+                  </a:txBody>
+                  <a:tcPr/>
+                </a:tc>
+                <a:tc>
+                  <a:txBody>
+                    <a:bodyPr/>
+                    <a:lstStyle/>
+                    <a:p>
+                      <a:r>
+                        <a:rPr lang="ja-JP"/>
+                        <a:t>△</a:t>
+                      </a:r>
+                    </a:p>
+                  </a:txBody>
+                  <a:tcPr/>
+                </a:tc>
+              </a:tr>
+              <a:tr h="370000">
+                <a:tc>
+                  <a:txBody>
+                    <a:bodyPr/>
+                    <a:lstStyle/>
+                    <a:p>
+                      <a:r>
+                        <a:rPr lang="ja-JP"/>
+                        <a:t>段階移行</a:t>
+                      </a:r>
+                    </a:p>
+                  </a:txBody>
+                  <a:tcPr/>
+                </a:tc>
+                <a:tc>
+                  <a:txBody>
+                    <a:bodyPr/>
+                    <a:lstStyle/>
+                    <a:p>
+                      <a:r>
+                        <a:rPr lang="ja-JP"/>
+                        <a:t>4 時間 × 3 回</a:t>
+                      </a:r>
+                    </a:p>
+                  </a:txBody>
+                  <a:tcPr/>
+                </a:tc>
+                <a:tc>
+                  <a:txBody>
+                    <a:bodyPr/>
+                    <a:lstStyle/>
+                    <a:p>
+                      <a:r>
+                        <a:rPr lang="ja-JP"/>
+                        <a:t>可（2 時間）</a:t>
+                      </a:r>
+                    </a:p>
+                  </a:txBody>
+                  <a:tcPr/>
+                </a:tc>
+                <a:tc>
+                  <a:txBody>
+                    <a:bodyPr/>
+                    <a:lstStyle/>
+                    <a:p>
+                      <a:r>
+                        <a:rPr lang="ja-JP"/>
+                        <a:t>中</a:t>
+                      </a:r>
+                    </a:p>
+                  </a:txBody>
+                  <a:tcPr/>
+                </a:tc>
+                <a:tc>
+                  <a:txBody>
+                    <a:bodyPr/>
+                    <a:lstStyle/>
+                    <a:p>
+                      <a:r>
+                        <a:rPr lang="ja-JP"/>
+                        <a:t>○</a:t>
+                      </a:r>
+                    </a:p>
+                  </a:txBody>
+                  <a:tcPr/>
+                </a:tc>
+              </a:tr>
+              <a:tr h="370000">
+                <a:tc>
+                  <a:txBody>
+                    <a:bodyPr/>
+                    <a:lstStyle/>
+                    <a:p>
+                      <a:r>
+                        <a:rPr lang="ja-JP"/>
+                        <a:t>並行稼働</a:t>
+                      </a:r>
+                    </a:p>
+                  </a:txBody>
+                  <a:tcPr/>
+                </a:tc>
+                <a:tc>
+                  <a:txBody>
+                    <a:bodyPr/>
+                    <a:lstStyle/>
+                    <a:p>
+                      <a:r>
+                        <a:rPr lang="ja-JP"/>
+                        <a:t>0 時間</a:t>
+                      </a:r>
+                    </a:p>
+                  </a:txBody>
+                  <a:tcPr/>
+                </a:tc>
+                <a:tc>
+                  <a:txBody>
+                    <a:bodyPr/>
+                    <a:lstStyle/>
+                    <a:p>
+                      <a:r>
+                        <a:rPr lang="ja-JP"/>
+                        <a:t>可</a:t>
+                      </a:r>
+                    </a:p>
+                  </a:txBody>
+                  <a:tcPr/>
+                </a:tc>
+                <a:tc>
+                  <a:txBody>
+                    <a:bodyPr/>
+                    <a:lstStyle/>
+                    <a:p>
+                      <a:r>
+                        <a:rPr lang="ja-JP"/>
+                        <a:t>高</a:t>
+                      </a:r>
+                    </a:p>
+                  </a:txBody>
+                  <a:tcPr/>
+                </a:tc>
+                <a:tc>
+                  <a:txBody>
+                    <a:bodyPr/>
+                    <a:lstStyle/>
+                    <a:p>
+                      <a:r>
+                        <a:rPr lang="ja-JP"/>
+                        <a:t>△</a:t>
+                      </a:r>
+                    </a:p>
+                  </a:txBody>
+                  <a:tcPr/>
+                </a:tc>
+              </a:tr>
+            </a:tbl>
+          </a:graphicData>
+        </a:graphic>
+      </p:graphicFrame>
+    </p:spTree>
+  </p:cSld>
+</p:sld>
+</file>
+
+<file path=ppt/slides/slide8.xml><?xml version="1.0" encoding="utf-8"?>
+<p:sld xmlns:a="http://schemas.openxmlformats.org/drawingml/2006/main" xmlns:r="http://schemas.openxmlformats.org/officeDocument/2006/relationships" xmlns:p="http://schemas.openxmlformats.org/presentationml/2006/main">
+  <p:cSld>
+    <p:spTree>
+      <p:nvGrpSpPr>
+        <p:cNvPr id="1" name=""/>
+        <p:cNvGrpSpPr/>
+        <p:nvPr/>
+      </p:nvGrpSpPr>
+      <p:grpSpPr/>
+      <p:sp>
+        <p:nvSpPr>
+          <p:cNvPr id="2" name="タイトル 1"/>
+          <p:cNvSpPr>
+            <a:spLocks noGrp="1"/>
+          </p:cNvSpPr>
+          <p:nvPr>
+            <p:ph type="title"/>
+          </p:nvPr>
+        </p:nvSpPr>
+        <p:spPr>
+          <a:xfrm>
+            <a:off x="700000" y="500000"/>
+            <a:ext cx="10792000" cy="1000000"/>
+          </a:xfrm>
+          <a:prstGeom prst="rect">
+            <a:avLst/>
+          </a:prstGeom>
+        </p:spPr>
+        <p:txBody>
+          <a:bodyPr/>
+          <a:lstStyle/>
+          <a:p>
+            <a:r>
+              <a:rPr lang="ja-JP"/>
+              <a:t>本提案の対象外（やらないこと）</a:t>
+            </a:r>
+          </a:p>
+        </p:txBody>
+      </p:sp>
+      <p:sp>
+        <p:nvSpPr>
+          <p:cNvPr id="3" name="対象外"/>
+          <p:cNvSpPr>
+            <a:spLocks noGrp="1"/>
+          </p:cNvSpPr>
+          <p:nvPr/>
+        </p:nvSpPr>
+        <p:spPr>
+          <a:xfrm>
+            <a:off x="700000" y="1900000"/>
+            <a:ext cx="2200000" cy="900000"/>
+          </a:xfrm>
+          <a:prstGeom prst="rect">
+            <a:avLst/>
+          </a:prstGeom>
+        </p:spPr>
+        <p:txBody>
+          <a:bodyPr/>
+          <a:lstStyle/>
+          <a:p>
+            <a:r>
+              <a:rPr lang="ja-JP"/>
+              <a:t>・帳票のレイアウト変更（現行踏襲とする）</a:t>
+            </a:r>
+            <a:br/>
+            <a:r>
+              <a:rPr lang="ja-JP"/>
+              <a:t>・会計パッケージ側の改修</a:t>
+            </a:r>
+            <a:br/>
+            <a:r>
+              <a:rPr lang="ja-JP"/>
+              <a:t>・得意先マスタの名寄せ（別プロジェクト）</a:t>
+            </a:r>
+            <a:br/>
+            <a:r>
+              <a:rPr lang="ja-JP"/>
+              <a:t>・モバイル対応（次期以降）</a:t>
+            </a:r>
+          </a:p>
+        </p:txBody>
+      </p:sp>
+    </p:spTree>
+  </p:cSld>
+</p:sld>
+</file>
+
+<file path=ppt/slides/slide9.xml><?xml version="1.0" encoding="utf-8"?>
 <p:sld xmlns:a="http://schemas.openxmlformats.org/drawingml/2006/main" xmlns:r="http://schemas.openxmlformats.org/officeDocument/2006/relationships" xmlns:p="http://schemas.openxmlformats.org/presentationml/2006/main" show="0">
   <p:cSld>
     <p:spTree>
@@ -957,21 +3001,6 @@
           </a:p>
         </p:txBody>
       </p:sp>
-    </p:spTree>
-  </p:cSld>
-</p:sld>
-</file>
-
-<file path=ppt/slides/slide5.xml><?xml version="1.0" encoding="utf-8"?>
-<p:sld xmlns:a="http://schemas.openxmlformats.org/drawingml/2006/main" xmlns:r="http://schemas.openxmlformats.org/officeDocument/2006/relationships" xmlns:p="http://schemas.openxmlformats.org/presentationml/2006/main">
-  <p:cSld>
-    <p:spTree>
-      <p:nvGrpSpPr>
-        <p:cNvPr id="1" name=""/>
-        <p:cNvGrpSpPr/>
-        <p:nvPr/>
-      </p:nvGrpSpPr>
-      <p:grpSpPr/>
     </p:spTree>
   </p:cSld>
 </p:sld>

--- a/examples/from-documents/資料/方式提案.pptx
+++ b/examples/from-documents/資料/方式提案.pptx
@@ -5,7 +5,7 @@
     <p:sldMasterId id="2147483648" r:id="rId1"/>
   </p:sldMasterIdLst>
   <p:notesMasterIdLst>
-    <p:notesMasterId r:id="rId12"/>
+    <p:notesMasterId r:id="rId16"/>
   </p:notesMasterIdLst>
   <p:sldIdLst>
     <p:sldId id="256" r:id="rId2"/>
@@ -18,6 +18,10 @@
     <p:sldId id="263" r:id="rId9"/>
     <p:sldId id="264" r:id="rId10"/>
     <p:sldId id="265" r:id="rId11"/>
+    <p:sldId id="266" r:id="rId12"/>
+    <p:sldId id="267" r:id="rId13"/>
+    <p:sldId id="268" r:id="rId14"/>
+    <p:sldId id="269" r:id="rId15"/>
   </p:sldIdLst>
   <p:sldSz cx="12192000" cy="6858000"/>
   <p:notesSz cx="6858000" cy="9144000"/>
@@ -29,6 +33,15 @@
   <p:cmAuthor id="1" name="鈴木（PMO）" initials="" lastIdx="1" clrIdx="0"/>
   <p:cmAuthor id="2" name="高橋（インフラ）" initials="" lastIdx="1" clrIdx="1"/>
 </p:cmAuthorLst>
+</file>
+
+<file path=ppt/comments/comment12.xml><?xml version="1.0" encoding="utf-8"?>
+<p:cmLst xmlns:a="http://schemas.openxmlformats.org/drawingml/2006/main" xmlns:r="http://schemas.openxmlformats.org/officeDocument/2006/relationships" xmlns:p="http://schemas.openxmlformats.org/presentationml/2006/main">
+  <p:cm authorId="2" dt="2026-08-04T09:00:00Z" idx="1">
+    <p:pos x="100" y="100"/>
+    <p:text>月次バッチの現行実測は測っていません。空欄は 0 ではなく未測定です</p:text>
+  </p:cm>
+</p:cmLst>
 </file>
 
 <file path=ppt/comments/comment3.xml><?xml version="1.0" encoding="utf-8"?>
@@ -143,6 +156,77 @@
             <a:r>
               <a:rPr lang="ja-JP"/>
               <a:t>同じ検討をもう一度やることになるので採らなかった。</a:t>
+            </a:r>
+          </a:p>
+        </p:txBody>
+      </p:sp>
+    </p:spTree>
+  </p:cSld>
+</p:notes>
+</file>
+
+<file path=ppt/notesSlides/notesSlide11.xml><?xml version="1.0" encoding="utf-8"?>
+<p:notes xmlns:a="http://schemas.openxmlformats.org/drawingml/2006/main" xmlns:r="http://schemas.openxmlformats.org/officeDocument/2006/relationships" xmlns:p="http://schemas.openxmlformats.org/presentationml/2006/main">
+  <p:cSld>
+    <p:spTree>
+      <p:nvGrpSpPr>
+        <p:cNvPr id="1" name=""/>
+        <p:cNvGrpSpPr/>
+        <p:nvPr/>
+      </p:nvGrpSpPr>
+      <p:grpSpPr/>
+      <p:sp>
+        <p:nvSpPr>
+          <p:cNvPr id="2" name="スライド番号 プレースホルダー"/>
+          <p:cNvSpPr>
+            <a:spLocks noGrp="1"/>
+          </p:cNvSpPr>
+          <p:nvPr>
+            <p:ph type="sldNum"/>
+          </p:nvPr>
+        </p:nvSpPr>
+        <p:spPr/>
+        <p:txBody>
+          <a:bodyPr/>
+          <a:lstStyle/>
+          <a:p>
+            <a:r>
+              <a:rPr lang="ja-JP"/>
+              <a:t>11</a:t>
+            </a:r>
+          </a:p>
+        </p:txBody>
+      </p:sp>
+      <p:sp>
+        <p:nvSpPr>
+          <p:cNvPr id="3" name="ノート プレースホルダー"/>
+          <p:cNvSpPr>
+            <a:spLocks noGrp="1"/>
+          </p:cNvSpPr>
+          <p:nvPr>
+            <p:ph type="body" idx="1"/>
+          </p:nvPr>
+        </p:nvSpPr>
+        <p:spPr/>
+        <p:txBody>
+          <a:bodyPr/>
+          <a:lstStyle/>
+          <a:p>
+            <a:r>
+              <a:rPr lang="ja-JP"/>
+              <a:t>日次と月次で実行基盤を分けるのは、月次の締めが日次の遅延に</a:t>
+            </a:r>
+          </a:p>
+          <a:p>
+            <a:r>
+              <a:rPr lang="ja-JP"/>
+              <a:t>引きずられないようにするためである（現行はここが 1 つで、</a:t>
+            </a:r>
+          </a:p>
+          <a:p>
+            <a:r>
+              <a:rPr lang="ja-JP"/>
+              <a:t>月初の 3 日間は日次が遅れると締めも遅れていた）。</a:t>
             </a:r>
           </a:p>
         </p:txBody>
@@ -350,6 +434,71 @@
             <a:r>
               <a:rPr lang="ja-JP"/>
               <a:t>段階移行を推す。停止時間よりも切戻しの確実性を採った。</a:t>
+            </a:r>
+          </a:p>
+        </p:txBody>
+      </p:sp>
+    </p:spTree>
+  </p:cSld>
+</p:notes>
+</file>
+
+<file path=ppt/notesSlides/notesSlide9.xml><?xml version="1.0" encoding="utf-8"?>
+<p:notes xmlns:a="http://schemas.openxmlformats.org/drawingml/2006/main" xmlns:r="http://schemas.openxmlformats.org/officeDocument/2006/relationships" xmlns:p="http://schemas.openxmlformats.org/presentationml/2006/main">
+  <p:cSld>
+    <p:spTree>
+      <p:nvGrpSpPr>
+        <p:cNvPr id="1" name=""/>
+        <p:cNvGrpSpPr/>
+        <p:nvPr/>
+      </p:nvGrpSpPr>
+      <p:grpSpPr/>
+      <p:sp>
+        <p:nvSpPr>
+          <p:cNvPr id="2" name="スライド番号 プレースホルダー"/>
+          <p:cNvSpPr>
+            <a:spLocks noGrp="1"/>
+          </p:cNvSpPr>
+          <p:nvPr>
+            <p:ph type="sldNum"/>
+          </p:nvPr>
+        </p:nvSpPr>
+        <p:spPr/>
+        <p:txBody>
+          <a:bodyPr/>
+          <a:lstStyle/>
+          <a:p>
+            <a:r>
+              <a:rPr lang="ja-JP"/>
+              <a:t>9</a:t>
+            </a:r>
+          </a:p>
+        </p:txBody>
+      </p:sp>
+      <p:sp>
+        <p:nvSpPr>
+          <p:cNvPr id="3" name="ノート プレースホルダー"/>
+          <p:cNvSpPr>
+            <a:spLocks noGrp="1"/>
+          </p:cNvSpPr>
+          <p:nvPr>
+            <p:ph type="body" idx="1"/>
+          </p:nvPr>
+        </p:nvSpPr>
+        <p:spPr/>
+        <p:txBody>
+          <a:bodyPr/>
+          <a:lstStyle/>
+          <a:p>
+            <a:r>
+              <a:rPr lang="ja-JP"/>
+              <a:t>営業事務の権限は 2026-08 時点で未確定である。</a:t>
+            </a:r>
+          </a:p>
+          <a:p>
+            <a:r>
+              <a:rPr lang="ja-JP"/>
+              <a:t>与信照会を見せるかどうかは、個人情報の扱いと合わせて別途決める。</a:t>
             </a:r>
           </a:p>
         </p:txBody>
@@ -658,6 +807,1743 @@
         <p:nvPr/>
       </p:nvGrpSpPr>
       <p:grpSpPr/>
+      <p:sp>
+        <p:nvSpPr>
+          <p:cNvPr id="2" name="タイトル 1"/>
+          <p:cNvSpPr>
+            <a:spLocks noGrp="1"/>
+          </p:cNvSpPr>
+          <p:nvPr>
+            <p:ph type="title"/>
+          </p:nvPr>
+        </p:nvSpPr>
+        <p:spPr>
+          <a:xfrm>
+            <a:off x="700000" y="500000"/>
+            <a:ext cx="10792000" cy="1000000"/>
+          </a:xfrm>
+          <a:prstGeom prst="rect">
+            <a:avLst/>
+          </a:prstGeom>
+        </p:spPr>
+        <p:txBody>
+          <a:bodyPr/>
+          <a:lstStyle/>
+          <a:p>
+            <a:r>
+              <a:rPr lang="ja-JP"/>
+              <a:t>コード体系と採番規則</a:t>
+            </a:r>
+          </a:p>
+        </p:txBody>
+      </p:sp>
+      <p:graphicFrame>
+        <p:nvGraphicFramePr>
+          <p:cNvPr id="3" name="表 3"/>
+          <p:cNvGraphicFramePr/>
+          <p:nvPr/>
+        </p:nvGraphicFramePr>
+        <p:xfrm>
+          <a:off x="700000" y="1900000"/>
+          <a:ext cx="10792000" cy="2220000"/>
+        </p:xfrm>
+        <a:graphic>
+          <a:graphicData uri="http://schemas.openxmlformats.org/drawingml/2006/table">
+            <a:tbl>
+              <a:tblPr/>
+              <a:tblGrid>
+                <a:gridCol w="2698000"/>
+                <a:gridCol w="2698000"/>
+                <a:gridCol w="2698000"/>
+                <a:gridCol w="2698000"/>
+              </a:tblGrid>
+              <a:tr h="370000">
+                <a:tc>
+                  <a:txBody>
+                    <a:bodyPr/>
+                    <a:lstStyle/>
+                    <a:p>
+                      <a:r>
+                        <a:rPr lang="ja-JP"/>
+                        <a:t>区分コード</a:t>
+                      </a:r>
+                    </a:p>
+                  </a:txBody>
+                  <a:tcPr/>
+                </a:tc>
+                <a:tc>
+                  <a:txBody>
+                    <a:bodyPr/>
+                    <a:lstStyle/>
+                    <a:p>
+                      <a:r>
+                        <a:rPr lang="ja-JP"/>
+                        <a:t>区分名</a:t>
+                      </a:r>
+                    </a:p>
+                  </a:txBody>
+                  <a:tcPr/>
+                </a:tc>
+                <a:tc>
+                  <a:txBody>
+                    <a:bodyPr/>
+                    <a:lstStyle/>
+                    <a:p>
+                      <a:r>
+                        <a:rPr lang="ja-JP"/>
+                        <a:t>説明</a:t>
+                      </a:r>
+                    </a:p>
+                  </a:txBody>
+                  <a:tcPr/>
+                </a:tc>
+                <a:tc>
+                  <a:txBody>
+                    <a:bodyPr/>
+                    <a:lstStyle/>
+                    <a:p>
+                      <a:r>
+                        <a:rPr lang="ja-JP"/>
+                        <a:t>遷移先</a:t>
+                      </a:r>
+                    </a:p>
+                  </a:txBody>
+                  <a:tcPr/>
+                </a:tc>
+              </a:tr>
+              <a:tr h="370000">
+                <a:tc>
+                  <a:txBody>
+                    <a:bodyPr/>
+                    <a:lstStyle/>
+                    <a:p>
+                      <a:r>
+                        <a:rPr lang="ja-JP"/>
+                        <a:t>01</a:t>
+                      </a:r>
+                    </a:p>
+                  </a:txBody>
+                  <a:tcPr/>
+                </a:tc>
+                <a:tc>
+                  <a:txBody>
+                    <a:bodyPr/>
+                    <a:lstStyle/>
+                    <a:p>
+                      <a:r>
+                        <a:rPr lang="ja-JP"/>
+                        <a:t>受付</a:t>
+                      </a:r>
+                    </a:p>
+                  </a:txBody>
+                  <a:tcPr/>
+                </a:tc>
+                <a:tc>
+                  <a:txBody>
+                    <a:bodyPr/>
+                    <a:lstStyle/>
+                    <a:p>
+                      <a:r>
+                        <a:rPr lang="ja-JP"/>
+                        <a:t>受注を受け付けた状態。与信も在庫引当も未実施</a:t>
+                      </a:r>
+                    </a:p>
+                  </a:txBody>
+                  <a:tcPr/>
+                </a:tc>
+                <a:tc>
+                  <a:txBody>
+                    <a:bodyPr/>
+                    <a:lstStyle/>
+                    <a:p>
+                      <a:r>
+                        <a:rPr lang="ja-JP"/>
+                        <a:t>02</a:t>
+                      </a:r>
+                    </a:p>
+                  </a:txBody>
+                  <a:tcPr/>
+                </a:tc>
+              </a:tr>
+              <a:tr h="370000">
+                <a:tc>
+                  <a:txBody>
+                    <a:bodyPr/>
+                    <a:lstStyle/>
+                    <a:p>
+                      <a:r>
+                        <a:rPr lang="ja-JP"/>
+                        <a:t>02</a:t>
+                      </a:r>
+                    </a:p>
+                  </a:txBody>
+                  <a:tcPr/>
+                </a:tc>
+                <a:tc>
+                  <a:txBody>
+                    <a:bodyPr/>
+                    <a:lstStyle/>
+                    <a:p>
+                      <a:r>
+                        <a:rPr lang="ja-JP"/>
+                        <a:t>与信中</a:t>
+                      </a:r>
+                    </a:p>
+                  </a:txBody>
+                  <a:tcPr/>
+                </a:tc>
+                <a:tc>
+                  <a:txBody>
+                    <a:bodyPr/>
+                    <a:lstStyle/>
+                    <a:p>
+                      <a:r>
+                        <a:rPr lang="ja-JP"/>
+                        <a:t>与信照会を投げた状態（結果待ち）</a:t>
+                      </a:r>
+                    </a:p>
+                  </a:txBody>
+                  <a:tcPr/>
+                </a:tc>
+                <a:tc>
+                  <a:txBody>
+                    <a:bodyPr/>
+                    <a:lstStyle/>
+                    <a:p>
+                      <a:r>
+                        <a:rPr lang="ja-JP"/>
+                        <a:t>03／09</a:t>
+                      </a:r>
+                    </a:p>
+                  </a:txBody>
+                  <a:tcPr/>
+                </a:tc>
+              </a:tr>
+              <a:tr h="370000">
+                <a:tc>
+                  <a:txBody>
+                    <a:bodyPr/>
+                    <a:lstStyle/>
+                    <a:p>
+                      <a:r>
+                        <a:rPr lang="ja-JP"/>
+                        <a:t>03</a:t>
+                      </a:r>
+                    </a:p>
+                  </a:txBody>
+                  <a:tcPr/>
+                </a:tc>
+                <a:tc>
+                  <a:txBody>
+                    <a:bodyPr/>
+                    <a:lstStyle/>
+                    <a:p>
+                      <a:r>
+                        <a:rPr lang="ja-JP"/>
+                        <a:t>確定</a:t>
+                      </a:r>
+                    </a:p>
+                  </a:txBody>
+                  <a:tcPr/>
+                </a:tc>
+                <a:tc>
+                  <a:txBody>
+                    <a:bodyPr/>
+                    <a:lstStyle/>
+                    <a:p>
+                      <a:r>
+                        <a:rPr lang="ja-JP"/>
+                        <a:t>与信 OK、在庫引当済み。取消には承認が要る</a:t>
+                      </a:r>
+                    </a:p>
+                  </a:txBody>
+                  <a:tcPr/>
+                </a:tc>
+                <a:tc>
+                  <a:txBody>
+                    <a:bodyPr/>
+                    <a:lstStyle/>
+                    <a:p>
+                      <a:r>
+                        <a:rPr lang="ja-JP"/>
+                        <a:t>04／09</a:t>
+                      </a:r>
+                    </a:p>
+                  </a:txBody>
+                  <a:tcPr/>
+                </a:tc>
+              </a:tr>
+              <a:tr h="370000">
+                <a:tc>
+                  <a:txBody>
+                    <a:bodyPr/>
+                    <a:lstStyle/>
+                    <a:p>
+                      <a:r>
+                        <a:rPr lang="ja-JP"/>
+                        <a:t>04</a:t>
+                      </a:r>
+                    </a:p>
+                  </a:txBody>
+                  <a:tcPr/>
+                </a:tc>
+                <a:tc>
+                  <a:txBody>
+                    <a:bodyPr/>
+                    <a:lstStyle/>
+                    <a:p>
+                      <a:r>
+                        <a:rPr lang="ja-JP"/>
+                        <a:t>出荷済</a:t>
+                      </a:r>
+                    </a:p>
+                  </a:txBody>
+                  <a:tcPr/>
+                </a:tc>
+                <a:tc>
+                  <a:txBody>
+                    <a:bodyPr/>
+                    <a:lstStyle/>
+                    <a:p>
+                      <a:r>
+                        <a:rPr lang="ja-JP"/>
+                        <a:t>出荷指示を発行した状態</a:t>
+                      </a:r>
+                    </a:p>
+                  </a:txBody>
+                  <a:tcPr/>
+                </a:tc>
+                <a:tc>
+                  <a:txBody>
+                    <a:bodyPr/>
+                    <a:lstStyle/>
+                    <a:p>
+                      <a:r>
+                        <a:rPr lang="ja-JP"/>
+                        <a:t>―</a:t>
+                      </a:r>
+                    </a:p>
+                  </a:txBody>
+                  <a:tcPr/>
+                </a:tc>
+              </a:tr>
+              <a:tr h="370000">
+                <a:tc>
+                  <a:txBody>
+                    <a:bodyPr/>
+                    <a:lstStyle/>
+                    <a:p>
+                      <a:r>
+                        <a:rPr lang="ja-JP"/>
+                        <a:t>09</a:t>
+                      </a:r>
+                    </a:p>
+                  </a:txBody>
+                  <a:tcPr/>
+                </a:tc>
+                <a:tc>
+                  <a:txBody>
+                    <a:bodyPr/>
+                    <a:lstStyle/>
+                    <a:p>
+                      <a:r>
+                        <a:rPr lang="ja-JP"/>
+                        <a:t>取消</a:t>
+                      </a:r>
+                    </a:p>
+                  </a:txBody>
+                  <a:tcPr/>
+                </a:tc>
+                <a:tc>
+                  <a:txBody>
+                    <a:bodyPr/>
+                    <a:lstStyle/>
+                    <a:p>
+                      <a:r>
+                        <a:rPr lang="ja-JP"/>
+                        <a:t>赤伝で取り消した状態</a:t>
+                      </a:r>
+                    </a:p>
+                  </a:txBody>
+                  <a:tcPr/>
+                </a:tc>
+                <a:tc>
+                  <a:txBody>
+                    <a:bodyPr/>
+                    <a:lstStyle/>
+                    <a:p>
+                      <a:r>
+                        <a:rPr lang="ja-JP"/>
+                        <a:t>―</a:t>
+                      </a:r>
+                    </a:p>
+                  </a:txBody>
+                  <a:tcPr/>
+                </a:tc>
+              </a:tr>
+            </a:tbl>
+          </a:graphicData>
+        </a:graphic>
+      </p:graphicFrame>
+      <p:graphicFrame>
+        <p:nvGraphicFramePr>
+          <p:cNvPr id="4" name="表 4"/>
+          <p:cNvGraphicFramePr/>
+          <p:nvPr/>
+        </p:nvGraphicFramePr>
+        <p:xfrm>
+          <a:off x="700000" y="4420000"/>
+          <a:ext cx="10792000" cy="1110000"/>
+        </p:xfrm>
+        <a:graphic>
+          <a:graphicData uri="http://schemas.openxmlformats.org/drawingml/2006/table">
+            <a:tbl>
+              <a:tblPr/>
+              <a:tblGrid>
+                <a:gridCol w="2698000"/>
+                <a:gridCol w="2698000"/>
+                <a:gridCol w="2698000"/>
+                <a:gridCol w="2698000"/>
+              </a:tblGrid>
+              <a:tr h="370000">
+                <a:tc>
+                  <a:txBody>
+                    <a:bodyPr/>
+                    <a:lstStyle/>
+                    <a:p>
+                      <a:r>
+                        <a:rPr lang="ja-JP"/>
+                        <a:t>対象</a:t>
+                      </a:r>
+                    </a:p>
+                  </a:txBody>
+                  <a:tcPr/>
+                </a:tc>
+                <a:tc>
+                  <a:txBody>
+                    <a:bodyPr/>
+                    <a:lstStyle/>
+                    <a:p>
+                      <a:r>
+                        <a:rPr lang="ja-JP"/>
+                        <a:t>採番規則</a:t>
+                      </a:r>
+                    </a:p>
+                  </a:txBody>
+                  <a:tcPr/>
+                </a:tc>
+                <a:tc>
+                  <a:txBody>
+                    <a:bodyPr/>
+                    <a:lstStyle/>
+                    <a:p>
+                      <a:r>
+                        <a:rPr lang="ja-JP"/>
+                        <a:t>桁</a:t>
+                      </a:r>
+                    </a:p>
+                  </a:txBody>
+                  <a:tcPr/>
+                </a:tc>
+                <a:tc>
+                  <a:txBody>
+                    <a:bodyPr/>
+                    <a:lstStyle/>
+                    <a:p>
+                      <a:r>
+                        <a:rPr lang="ja-JP"/>
+                        <a:t>採番元</a:t>
+                      </a:r>
+                    </a:p>
+                  </a:txBody>
+                  <a:tcPr/>
+                </a:tc>
+              </a:tr>
+              <a:tr h="370000">
+                <a:tc>
+                  <a:txBody>
+                    <a:bodyPr/>
+                    <a:lstStyle/>
+                    <a:p>
+                      <a:r>
+                        <a:rPr lang="ja-JP"/>
+                        <a:t>受注番号</a:t>
+                      </a:r>
+                    </a:p>
+                  </a:txBody>
+                  <a:tcPr/>
+                </a:tc>
+                <a:tc>
+                  <a:txBody>
+                    <a:bodyPr/>
+                    <a:lstStyle/>
+                    <a:p>
+                      <a:r>
+                        <a:rPr lang="ja-JP"/>
+                        <a:t>ORD + 年下 2 桁 + 通番 5 桁（例 ORD2600001）</a:t>
+                      </a:r>
+                    </a:p>
+                  </a:txBody>
+                  <a:tcPr/>
+                </a:tc>
+                <a:tc>
+                  <a:txBody>
+                    <a:bodyPr/>
+                    <a:lstStyle/>
+                    <a:p>
+                      <a:r>
+                        <a:rPr lang="ja-JP"/>
+                        <a:t>10</a:t>
+                      </a:r>
+                    </a:p>
+                  </a:txBody>
+                  <a:tcPr/>
+                </a:tc>
+                <a:tc>
+                  <a:txBody>
+                    <a:bodyPr/>
+                    <a:lstStyle/>
+                    <a:p>
+                      <a:r>
+                        <a:rPr lang="ja-JP"/>
+                        <a:t>採番テーブル</a:t>
+                      </a:r>
+                    </a:p>
+                  </a:txBody>
+                  <a:tcPr/>
+                </a:tc>
+              </a:tr>
+              <a:tr h="370000">
+                <a:tc>
+                  <a:txBody>
+                    <a:bodyPr/>
+                    <a:lstStyle/>
+                    <a:p>
+                      <a:r>
+                        <a:rPr lang="ja-JP"/>
+                        <a:t>得意先コード</a:t>
+                      </a:r>
+                    </a:p>
+                  </a:txBody>
+                  <a:tcPr/>
+                </a:tc>
+                <a:tc>
+                  <a:txBody>
+                    <a:bodyPr/>
+                    <a:lstStyle/>
+                    <a:p>
+                      <a:r>
+                        <a:rPr lang="ja-JP"/>
+                        <a:t>C + 通番 4 桁（前ゼロを残す）</a:t>
+                      </a:r>
+                    </a:p>
+                  </a:txBody>
+                  <a:tcPr/>
+                </a:tc>
+                <a:tc>
+                  <a:txBody>
+                    <a:bodyPr/>
+                    <a:lstStyle/>
+                    <a:p>
+                      <a:r>
+                        <a:rPr lang="ja-JP"/>
+                        <a:t>5</a:t>
+                      </a:r>
+                    </a:p>
+                  </a:txBody>
+                  <a:tcPr/>
+                </a:tc>
+                <a:tc>
+                  <a:txBody>
+                    <a:bodyPr/>
+                    <a:lstStyle/>
+                    <a:p>
+                      <a:r>
+                        <a:rPr lang="ja-JP"/>
+                        <a:t>手採番</a:t>
+                      </a:r>
+                    </a:p>
+                  </a:txBody>
+                  <a:tcPr/>
+                </a:tc>
+              </a:tr>
+            </a:tbl>
+          </a:graphicData>
+        </a:graphic>
+      </p:graphicFrame>
+    </p:spTree>
+  </p:cSld>
+</p:sld>
+</file>
+
+<file path=ppt/slides/slide11.xml><?xml version="1.0" encoding="utf-8"?>
+<p:sld xmlns:a="http://schemas.openxmlformats.org/drawingml/2006/main" xmlns:r="http://schemas.openxmlformats.org/officeDocument/2006/relationships" xmlns:p="http://schemas.openxmlformats.org/presentationml/2006/main">
+  <p:cSld>
+    <p:spTree>
+      <p:nvGrpSpPr>
+        <p:cNvPr id="1" name=""/>
+        <p:cNvGrpSpPr/>
+        <p:nvPr/>
+      </p:nvGrpSpPr>
+      <p:grpSpPr/>
+      <p:sp>
+        <p:nvSpPr>
+          <p:cNvPr id="2" name="タイトル 1"/>
+          <p:cNvSpPr>
+            <a:spLocks noGrp="1"/>
+          </p:cNvSpPr>
+          <p:nvPr>
+            <p:ph type="title"/>
+          </p:nvPr>
+        </p:nvSpPr>
+        <p:spPr>
+          <a:xfrm>
+            <a:off x="700000" y="500000"/>
+            <a:ext cx="10792000" cy="1000000"/>
+          </a:xfrm>
+          <a:prstGeom prst="rect">
+            <a:avLst/>
+          </a:prstGeom>
+        </p:spPr>
+        <p:txBody>
+          <a:bodyPr/>
+          <a:lstStyle/>
+          <a:p>
+            <a:r>
+              <a:rPr lang="ja-JP"/>
+              <a:t>新システムのゾーン構成（サブゾーン入り）</a:t>
+            </a:r>
+          </a:p>
+        </p:txBody>
+      </p:sp>
+      <p:grpSp>
+        <p:nvGrpSpPr>
+          <p:cNvPr id="3" name="新オンライン系" descr="現用／待機の 2 系統。DR サイトへは非同期複製"/>
+          <p:cNvGrpSpPr/>
+          <p:nvPr/>
+        </p:nvGrpSpPr>
+        <p:grpSpPr>
+          <a:xfrm>
+            <a:off x="700000" y="1900000"/>
+            <a:ext cx="7600000" cy="900000"/>
+            <a:chOff x="700000" y="1900000"/>
+            <a:chExt cx="7600000" cy="900000"/>
+          </a:xfrm>
+        </p:grpSpPr>
+        <p:sp>
+          <p:nvSpPr>
+            <p:cNvPr id="4" name="新受注入力"/>
+            <p:cNvSpPr>
+              <a:spLocks noGrp="1"/>
+            </p:cNvSpPr>
+            <p:nvPr/>
+          </p:nvSpPr>
+          <p:spPr>
+            <a:xfrm>
+              <a:off x="700000" y="1900000"/>
+              <a:ext cx="2200000" cy="900000"/>
+            </a:xfrm>
+            <a:prstGeom prst="rect">
+              <a:avLst/>
+            </a:prstGeom>
+          </p:spPr>
+          <p:txBody>
+            <a:bodyPr/>
+            <a:lstStyle/>
+            <a:p>
+              <a:r>
+                <a:rPr lang="ja-JP"/>
+                <a:t>受注入力</a:t>
+              </a:r>
+              <a:br/>
+              <a:r>
+                <a:rPr lang="ja-JP"/>
+                <a:t>（Web）</a:t>
+              </a:r>
+            </a:p>
+          </p:txBody>
+        </p:sp>
+        <p:sp>
+          <p:nvSpPr>
+            <p:cNvPr id="5" name="新与信照会"/>
+            <p:cNvSpPr>
+              <a:spLocks noGrp="1"/>
+            </p:cNvSpPr>
+            <p:nvPr/>
+          </p:nvSpPr>
+          <p:spPr>
+            <a:xfrm>
+              <a:off x="3400000" y="1900000"/>
+              <a:ext cx="2200000" cy="900000"/>
+            </a:xfrm>
+            <a:prstGeom prst="rect">
+              <a:avLst/>
+            </a:prstGeom>
+          </p:spPr>
+          <p:txBody>
+            <a:bodyPr/>
+            <a:lstStyle/>
+            <a:p>
+              <a:r>
+                <a:rPr lang="ja-JP"/>
+                <a:t>与信照会 API</a:t>
+              </a:r>
+            </a:p>
+          </p:txBody>
+        </p:sp>
+        <p:sp>
+          <p:nvSpPr>
+            <p:cNvPr id="6" name="新在庫引当"/>
+            <p:cNvSpPr>
+              <a:spLocks noGrp="1"/>
+            </p:cNvSpPr>
+            <p:nvPr/>
+          </p:nvSpPr>
+          <p:spPr>
+            <a:xfrm>
+              <a:off x="6100000" y="1900000"/>
+              <a:ext cx="2200000" cy="900000"/>
+            </a:xfrm>
+            <a:prstGeom prst="rect">
+              <a:avLst/>
+            </a:prstGeom>
+          </p:spPr>
+          <p:txBody>
+            <a:bodyPr/>
+            <a:lstStyle/>
+            <a:p>
+              <a:r>
+                <a:rPr lang="ja-JP"/>
+                <a:t>在庫引当</a:t>
+              </a:r>
+            </a:p>
+          </p:txBody>
+        </p:sp>
+      </p:grpSp>
+      <p:grpSp>
+        <p:nvGrpSpPr>
+          <p:cNvPr id="7" name="新バッチ系" descr="実行順は運用設計書 4.2 による。日次と月次で実行基盤が違う"/>
+          <p:cNvGrpSpPr/>
+          <p:nvPr/>
+        </p:nvGrpSpPr>
+        <p:grpSpPr>
+          <a:xfrm>
+            <a:off x="700000" y="1900000"/>
+            <a:ext cx="10300000" cy="2500000"/>
+            <a:chOff x="700000" y="1900000"/>
+            <a:chExt cx="10300000" cy="2500000"/>
+          </a:xfrm>
+        </p:grpSpPr>
+        <p:grpSp>
+          <p:nvGrpSpPr>
+            <p:cNvPr id="8" name="日次バッチ"/>
+            <p:cNvGrpSpPr/>
+            <p:nvPr/>
+          </p:nvGrpSpPr>
+          <p:grpSpPr>
+            <a:xfrm>
+              <a:off x="700000" y="1900000"/>
+              <a:ext cx="10300000" cy="2500000"/>
+              <a:chOff x="700000" y="1900000"/>
+              <a:chExt cx="10300000" cy="2500000"/>
+            </a:xfrm>
+          </p:grpSpPr>
+          <p:sp>
+            <p:nvSpPr>
+              <p:cNvPr id="9" name="売上計上B"/>
+              <p:cNvSpPr>
+                <a:spLocks noGrp="1"/>
+              </p:cNvSpPr>
+              <p:nvPr/>
+            </p:nvSpPr>
+            <p:spPr>
+              <a:xfrm>
+                <a:off x="8800000" y="1900000"/>
+                <a:ext cx="2200000" cy="900000"/>
+              </a:xfrm>
+              <a:prstGeom prst="rect">
+                <a:avLst/>
+              </a:prstGeom>
+            </p:spPr>
+            <p:txBody>
+              <a:bodyPr/>
+              <a:lstStyle/>
+              <a:p>
+                <a:r>
+                  <a:rPr lang="ja-JP"/>
+                  <a:t>売上計上</a:t>
+                </a:r>
+              </a:p>
+            </p:txBody>
+          </p:sp>
+          <p:sp>
+            <p:nvSpPr>
+              <p:cNvPr id="10" name="在庫締めB"/>
+              <p:cNvSpPr>
+                <a:spLocks noGrp="1"/>
+              </p:cNvSpPr>
+              <p:nvPr/>
+            </p:nvSpPr>
+            <p:spPr>
+              <a:xfrm>
+                <a:off x="700000" y="3500000"/>
+                <a:ext cx="2200000" cy="900000"/>
+              </a:xfrm>
+              <a:prstGeom prst="rect">
+                <a:avLst/>
+              </a:prstGeom>
+            </p:spPr>
+            <p:txBody>
+              <a:bodyPr/>
+              <a:lstStyle/>
+              <a:p>
+                <a:r>
+                  <a:rPr lang="ja-JP"/>
+                  <a:t>在庫締め</a:t>
+                </a:r>
+              </a:p>
+            </p:txBody>
+          </p:sp>
+        </p:grpSp>
+        <p:grpSp>
+          <p:nvGrpSpPr>
+            <p:cNvPr id="11" name="月次バッチ"/>
+            <p:cNvGrpSpPr/>
+            <p:nvPr/>
+          </p:nvGrpSpPr>
+          <p:grpSpPr>
+            <a:xfrm>
+              <a:off x="3400000" y="3500000"/>
+              <a:ext cx="4900000" cy="900000"/>
+              <a:chOff x="3400000" y="3500000"/>
+              <a:chExt cx="4900000" cy="900000"/>
+            </a:xfrm>
+          </p:grpSpPr>
+          <p:sp>
+            <p:nvSpPr>
+              <p:cNvPr id="12" name="請求締めB"/>
+              <p:cNvSpPr>
+                <a:spLocks noGrp="1"/>
+              </p:cNvSpPr>
+              <p:nvPr/>
+            </p:nvSpPr>
+            <p:spPr>
+              <a:xfrm>
+                <a:off x="3400000" y="3500000"/>
+                <a:ext cx="2200000" cy="900000"/>
+              </a:xfrm>
+              <a:prstGeom prst="rect">
+                <a:avLst/>
+              </a:prstGeom>
+            </p:spPr>
+            <p:txBody>
+              <a:bodyPr/>
+              <a:lstStyle/>
+              <a:p>
+                <a:r>
+                  <a:rPr lang="ja-JP"/>
+                  <a:t>請求締め</a:t>
+                </a:r>
+                <a:br/>
+                <a:r>
+                  <a:rPr lang="ja-JP"/>
+                  <a:t>（月次）</a:t>
+                </a:r>
+              </a:p>
+            </p:txBody>
+          </p:sp>
+          <p:sp>
+            <p:nvSpPr>
+              <p:cNvPr id="13" name="会計連携B"/>
+              <p:cNvSpPr>
+                <a:spLocks noGrp="1"/>
+              </p:cNvSpPr>
+              <p:nvPr/>
+            </p:nvSpPr>
+            <p:spPr>
+              <a:xfrm>
+                <a:off x="6100000" y="3500000"/>
+                <a:ext cx="2200000" cy="900000"/>
+              </a:xfrm>
+              <a:prstGeom prst="rect">
+                <a:avLst/>
+              </a:prstGeom>
+            </p:spPr>
+            <p:txBody>
+              <a:bodyPr/>
+              <a:lstStyle/>
+              <a:p>
+                <a:r>
+                  <a:rPr lang="ja-JP"/>
+                  <a:t>会計連携</a:t>
+                </a:r>
+              </a:p>
+            </p:txBody>
+          </p:sp>
+        </p:grpSp>
+      </p:grpSp>
+      <p:cxnSp>
+        <p:nvCxnSpPr>
+          <p:cNvPr id="14" name="同期"/>
+          <p:cNvCxnSpPr>
+            <a:stCxn id="4" idx="3"/>
+            <a:endCxn id="5" idx="1"/>
+          </p:cNvCxnSpPr>
+          <p:nvPr/>
+        </p:nvCxnSpPr>
+        <p:spPr>
+          <a:xfrm>
+            <a:off x="700000" y="1900000"/>
+            <a:ext cx="2200000" cy="0"/>
+          </a:xfrm>
+          <a:prstGeom prst="straightConnector1">
+            <a:avLst/>
+          </a:prstGeom>
+          <a:ln w="12700">
+            <a:prstDash val="solid"/>
+            <a:headEnd type="none"/>
+            <a:tailEnd type="triangle"/>
+          </a:ln>
+        </p:spPr>
+      </p:cxnSp>
+      <p:cxnSp>
+        <p:nvCxnSpPr>
+          <p:cNvPr id="15" name="同期"/>
+          <p:cNvCxnSpPr>
+            <a:stCxn id="5" idx="3"/>
+            <a:endCxn id="6" idx="1"/>
+          </p:cNvCxnSpPr>
+          <p:nvPr/>
+        </p:nvCxnSpPr>
+        <p:spPr>
+          <a:xfrm>
+            <a:off x="700000" y="1900000"/>
+            <a:ext cx="2200000" cy="0"/>
+          </a:xfrm>
+          <a:prstGeom prst="straightConnector1">
+            <a:avLst/>
+          </a:prstGeom>
+          <a:ln w="12700">
+            <a:prstDash val="solid"/>
+            <a:headEnd type="none"/>
+            <a:tailEnd type="triangle"/>
+          </a:ln>
+        </p:spPr>
+      </p:cxnSp>
+      <p:cxnSp>
+        <p:nvCxnSpPr>
+          <p:cNvPr id="16" name="夜間バッチ"/>
+          <p:cNvCxnSpPr>
+            <a:stCxn id="6" idx="3"/>
+            <a:endCxn id="9" idx="1"/>
+          </p:cNvCxnSpPr>
+          <p:nvPr/>
+        </p:nvCxnSpPr>
+        <p:spPr>
+          <a:xfrm>
+            <a:off x="700000" y="1900000"/>
+            <a:ext cx="2200000" cy="0"/>
+          </a:xfrm>
+          <a:prstGeom prst="straightConnector1">
+            <a:avLst/>
+          </a:prstGeom>
+          <a:ln w="12700">
+            <a:prstDash val="dash"/>
+            <a:headEnd type="none"/>
+            <a:tailEnd type="triangle"/>
+          </a:ln>
+        </p:spPr>
+      </p:cxnSp>
+      <p:cxnSp>
+        <p:nvCxnSpPr>
+          <p:cNvPr id="17" name="夜間バッチ"/>
+          <p:cNvCxnSpPr>
+            <a:stCxn id="9" idx="3"/>
+            <a:endCxn id="10" idx="1"/>
+          </p:cNvCxnSpPr>
+          <p:nvPr/>
+        </p:nvCxnSpPr>
+        <p:spPr>
+          <a:xfrm>
+            <a:off x="700000" y="1900000"/>
+            <a:ext cx="2200000" cy="0"/>
+          </a:xfrm>
+          <a:prstGeom prst="straightConnector1">
+            <a:avLst/>
+          </a:prstGeom>
+          <a:ln w="12700">
+            <a:prstDash val="dash"/>
+            <a:headEnd type="none"/>
+            <a:tailEnd type="triangle"/>
+          </a:ln>
+        </p:spPr>
+      </p:cxnSp>
+      <p:cxnSp>
+        <p:nvCxnSpPr>
+          <p:cNvPr id="18" name="月次"/>
+          <p:cNvCxnSpPr>
+            <a:stCxn id="10" idx="3"/>
+            <a:endCxn id="12" idx="1"/>
+          </p:cNvCxnSpPr>
+          <p:nvPr/>
+        </p:nvCxnSpPr>
+        <p:spPr>
+          <a:xfrm>
+            <a:off x="700000" y="1900000"/>
+            <a:ext cx="2200000" cy="0"/>
+          </a:xfrm>
+          <a:prstGeom prst="straightConnector1">
+            <a:avLst/>
+          </a:prstGeom>
+          <a:ln w="12700">
+            <a:prstDash val="dashDot"/>
+            <a:headEnd type="none"/>
+            <a:tailEnd type="triangle"/>
+          </a:ln>
+        </p:spPr>
+      </p:cxnSp>
+      <p:cxnSp>
+        <p:nvCxnSpPr>
+          <p:cNvPr id="19" name="月次"/>
+          <p:cNvCxnSpPr>
+            <a:stCxn id="12" idx="3"/>
+            <a:endCxn id="13" idx="1"/>
+          </p:cNvCxnSpPr>
+          <p:nvPr/>
+        </p:nvCxnSpPr>
+        <p:spPr>
+          <a:xfrm>
+            <a:off x="700000" y="1900000"/>
+            <a:ext cx="2200000" cy="0"/>
+          </a:xfrm>
+          <a:prstGeom prst="straightConnector1">
+            <a:avLst/>
+          </a:prstGeom>
+          <a:ln w="12700">
+            <a:prstDash val="dashDot"/>
+            <a:headEnd type="none"/>
+            <a:tailEnd type="triangle"/>
+          </a:ln>
+        </p:spPr>
+      </p:cxnSp>
+    </p:spTree>
+  </p:cSld>
+</p:sld>
+</file>
+
+<file path=ppt/slides/slide12.xml><?xml version="1.0" encoding="utf-8"?>
+<p:sld xmlns:a="http://schemas.openxmlformats.org/drawingml/2006/main" xmlns:r="http://schemas.openxmlformats.org/officeDocument/2006/relationships" xmlns:p="http://schemas.openxmlformats.org/presentationml/2006/main">
+  <p:cSld>
+    <p:spTree>
+      <p:nvGrpSpPr>
+        <p:cNvPr id="1" name=""/>
+        <p:cNvGrpSpPr/>
+        <p:nvPr/>
+      </p:nvGrpSpPr>
+      <p:grpSpPr/>
+      <p:sp>
+        <p:nvSpPr>
+          <p:cNvPr id="2" name="タイトル 1"/>
+          <p:cNvSpPr>
+            <a:spLocks noGrp="1"/>
+          </p:cNvSpPr>
+          <p:nvPr>
+            <p:ph type="title"/>
+          </p:nvPr>
+        </p:nvSpPr>
+        <p:spPr>
+          <a:xfrm>
+            <a:off x="700000" y="500000"/>
+            <a:ext cx="10792000" cy="1000000"/>
+          </a:xfrm>
+          <a:prstGeom prst="rect">
+            <a:avLst/>
+          </a:prstGeom>
+        </p:spPr>
+        <p:txBody>
+          <a:bodyPr/>
+          <a:lstStyle/>
+          <a:p>
+            <a:r>
+              <a:rPr lang="ja-JP"/>
+              <a:t>非機能要件の目標値</a:t>
+            </a:r>
+          </a:p>
+        </p:txBody>
+      </p:sp>
+      <p:graphicFrame>
+        <p:nvGraphicFramePr>
+          <p:cNvPr id="3" name="表 3"/>
+          <p:cNvGraphicFramePr/>
+          <p:nvPr/>
+        </p:nvGraphicFramePr>
+        <p:xfrm>
+          <a:off x="700000" y="1900000"/>
+          <a:ext cx="10792000" cy="2220000"/>
+        </p:xfrm>
+        <a:graphic>
+          <a:graphicData uri="http://schemas.openxmlformats.org/drawingml/2006/table">
+            <a:tbl>
+              <a:tblPr/>
+              <a:tblGrid>
+                <a:gridCol w="1541714"/>
+                <a:gridCol w="1541714"/>
+                <a:gridCol w="1541714"/>
+                <a:gridCol w="1541714"/>
+                <a:gridCol w="1541714"/>
+                <a:gridCol w="1541714"/>
+                <a:gridCol w="1541714"/>
+              </a:tblGrid>
+              <a:tr h="370000">
+                <a:tc>
+                  <a:txBody>
+                    <a:bodyPr/>
+                    <a:lstStyle/>
+                    <a:p>
+                      <a:r>
+                        <a:rPr lang="ja-JP"/>
+                        <a:t>区分</a:t>
+                      </a:r>
+                    </a:p>
+                  </a:txBody>
+                  <a:tcPr/>
+                </a:tc>
+                <a:tc>
+                  <a:txBody>
+                    <a:bodyPr/>
+                    <a:lstStyle/>
+                    <a:p>
+                      <a:r>
+                        <a:rPr lang="ja-JP"/>
+                        <a:t>項目</a:t>
+                      </a:r>
+                    </a:p>
+                  </a:txBody>
+                  <a:tcPr/>
+                </a:tc>
+                <a:tc>
+                  <a:txBody>
+                    <a:bodyPr/>
+                    <a:lstStyle/>
+                    <a:p>
+                      <a:r>
+                        <a:rPr lang="ja-JP"/>
+                        <a:t>現行実測</a:t>
+                      </a:r>
+                    </a:p>
+                  </a:txBody>
+                  <a:tcPr/>
+                </a:tc>
+                <a:tc>
+                  <a:txBody>
+                    <a:bodyPr/>
+                    <a:lstStyle/>
+                    <a:p>
+                      <a:r>
+                        <a:rPr lang="ja-JP"/>
+                        <a:t>目標値</a:t>
+                      </a:r>
+                    </a:p>
+                  </a:txBody>
+                  <a:tcPr/>
+                </a:tc>
+                <a:tc>
+                  <a:txBody>
+                    <a:bodyPr/>
+                    <a:lstStyle/>
+                    <a:p>
+                      <a:r>
+                        <a:rPr lang="ja-JP"/>
+                        <a:t>測定条件</a:t>
+                      </a:r>
+                    </a:p>
+                  </a:txBody>
+                  <a:tcPr/>
+                </a:tc>
+                <a:tc>
+                  <a:txBody>
+                    <a:bodyPr/>
+                    <a:lstStyle/>
+                    <a:p>
+                      <a:r>
+                        <a:rPr lang="ja-JP"/>
+                        <a:t>未達時の扱い</a:t>
+                      </a:r>
+                    </a:p>
+                  </a:txBody>
+                  <a:tcPr/>
+                </a:tc>
+                <a:tc>
+                  <a:txBody>
+                    <a:bodyPr/>
+                    <a:lstStyle/>
+                    <a:p>
+                      <a:r>
+                        <a:rPr lang="ja-JP"/>
+                        <a:t/>
+                      </a:r>
+                    </a:p>
+                  </a:txBody>
+                  <a:tcPr/>
+                </a:tc>
+              </a:tr>
+              <a:tr h="370000">
+                <a:tc>
+                  <a:txBody>
+                    <a:bodyPr/>
+                    <a:lstStyle/>
+                    <a:p>
+                      <a:r>
+                        <a:rPr lang="ja-JP"/>
+                        <a:t>性能</a:t>
+                      </a:r>
+                    </a:p>
+                  </a:txBody>
+                  <a:tcPr/>
+                </a:tc>
+                <a:tc>
+                  <a:txBody>
+                    <a:bodyPr/>
+                    <a:lstStyle/>
+                    <a:p>
+                      <a:r>
+                        <a:rPr lang="ja-JP"/>
+                        <a:t>受注登録の応答時間</a:t>
+                      </a:r>
+                    </a:p>
+                  </a:txBody>
+                  <a:tcPr/>
+                </a:tc>
+                <a:tc>
+                  <a:txBody>
+                    <a:bodyPr/>
+                    <a:lstStyle/>
+                    <a:p>
+                      <a:r>
+                        <a:rPr lang="ja-JP"/>
+                        <a:t>5.2 秒</a:t>
+                      </a:r>
+                    </a:p>
+                  </a:txBody>
+                  <a:tcPr/>
+                </a:tc>
+                <a:tc>
+                  <a:txBody>
+                    <a:bodyPr/>
+                    <a:lstStyle/>
+                    <a:p>
+                      <a:r>
+                        <a:rPr lang="ja-JP"/>
+                        <a:t>3 秒以内</a:t>
+                      </a:r>
+                    </a:p>
+                  </a:txBody>
+                  <a:tcPr/>
+                </a:tc>
+                <a:tc>
+                  <a:txBody>
+                    <a:bodyPr/>
+                    <a:lstStyle/>
+                    <a:p>
+                      <a:r>
+                        <a:rPr lang="ja-JP"/>
+                        <a:t>同時 50 セッションの 90 パーセンタイル</a:t>
+                      </a:r>
+                    </a:p>
+                  </a:txBody>
+                  <a:tcPr/>
+                </a:tc>
+                <a:tc>
+                  <a:txBody>
+                    <a:bodyPr/>
+                    <a:lstStyle/>
+                    <a:p>
+                      <a:r>
+                        <a:rPr lang="ja-JP"/>
+                        <a:t>稼働判定会議で決定</a:t>
+                      </a:r>
+                    </a:p>
+                  </a:txBody>
+                  <a:tcPr/>
+                </a:tc>
+                <a:tc>
+                  <a:txBody>
+                    <a:bodyPr/>
+                    <a:lstStyle/>
+                    <a:p>
+                      <a:r>
+                        <a:rPr lang="ja-JP"/>
+                        <a:t/>
+                      </a:r>
+                    </a:p>
+                  </a:txBody>
+                  <a:tcPr/>
+                </a:tc>
+              </a:tr>
+              <a:tr h="370000">
+                <a:tc vMerge="1">
+                  <a:txBody>
+                    <a:bodyPr/>
+                    <a:lstStyle/>
+                    <a:p>
+                      <a:r>
+                        <a:rPr lang="ja-JP"/>
+                        <a:t/>
+                      </a:r>
+                    </a:p>
+                  </a:txBody>
+                  <a:tcPr/>
+                </a:tc>
+                <a:tc>
+                  <a:txBody>
+                    <a:bodyPr/>
+                    <a:lstStyle/>
+                    <a:p>
+                      <a:r>
+                        <a:rPr lang="ja-JP"/>
+                        <a:t>日次バッチの処理時間</a:t>
+                      </a:r>
+                    </a:p>
+                  </a:txBody>
+                  <a:tcPr/>
+                </a:tc>
+                <a:tc>
+                  <a:txBody>
+                    <a:bodyPr/>
+                    <a:lstStyle/>
+                    <a:p>
+                      <a:r>
+                        <a:rPr lang="ja-JP"/>
+                        <a:t>6 時間</a:t>
+                      </a:r>
+                    </a:p>
+                  </a:txBody>
+                  <a:tcPr/>
+                </a:tc>
+                <a:tc>
+                  <a:txBody>
+                    <a:bodyPr/>
+                    <a:lstStyle/>
+                    <a:p>
+                      <a:r>
+                        <a:rPr lang="ja-JP"/>
+                        <a:t>4 時間以内</a:t>
+                      </a:r>
+                    </a:p>
+                  </a:txBody>
+                  <a:tcPr/>
+                </a:tc>
+                <a:tc>
+                  <a:txBody>
+                    <a:bodyPr/>
+                    <a:lstStyle/>
+                    <a:p>
+                      <a:r>
+                        <a:rPr lang="ja-JP"/>
+                        <a:t>受注 5</a:t>
+                      </a:r>
+                    </a:p>
+                  </a:txBody>
+                  <a:tcPr/>
+                </a:tc>
+                <a:tc>
+                  <a:txBody>
+                    <a:bodyPr/>
+                    <a:lstStyle/>
+                    <a:p>
+                      <a:r>
+                        <a:rPr lang="ja-JP"/>
+                        <a:t>000 件／日</a:t>
+                      </a:r>
+                    </a:p>
+                  </a:txBody>
+                  <a:tcPr/>
+                </a:tc>
+                <a:tc>
+                  <a:txBody>
+                    <a:bodyPr/>
+                    <a:lstStyle/>
+                    <a:p>
+                      <a:r>
+                        <a:rPr lang="ja-JP"/>
+                        <a:t>同上</a:t>
+                      </a:r>
+                    </a:p>
+                  </a:txBody>
+                  <a:tcPr/>
+                </a:tc>
+              </a:tr>
+              <a:tr h="370000">
+                <a:tc vMerge="1">
+                  <a:txBody>
+                    <a:bodyPr/>
+                    <a:lstStyle/>
+                    <a:p>
+                      <a:r>
+                        <a:rPr lang="ja-JP"/>
+                        <a:t/>
+                      </a:r>
+                    </a:p>
+                  </a:txBody>
+                  <a:tcPr/>
+                </a:tc>
+                <a:tc>
+                  <a:txBody>
+                    <a:bodyPr/>
+                    <a:lstStyle/>
+                    <a:p>
+                      <a:r>
+                        <a:rPr lang="ja-JP"/>
+                        <a:t>月次バッチの処理時間</a:t>
+                      </a:r>
+                    </a:p>
+                  </a:txBody>
+                  <a:tcPr/>
+                </a:tc>
+                <a:tc>
+                  <a:txBody>
+                    <a:bodyPr/>
+                    <a:lstStyle/>
+                    <a:p>
+                      <a:r>
+                        <a:rPr lang="ja-JP"/>
+                        <a:t/>
+                      </a:r>
+                    </a:p>
+                  </a:txBody>
+                  <a:tcPr/>
+                </a:tc>
+                <a:tc>
+                  <a:txBody>
+                    <a:bodyPr/>
+                    <a:lstStyle/>
+                    <a:p>
+                      <a:r>
+                        <a:rPr lang="ja-JP"/>
+                        <a:t>8 時間以内</a:t>
+                      </a:r>
+                    </a:p>
+                  </a:txBody>
+                  <a:tcPr/>
+                </a:tc>
+                <a:tc>
+                  <a:txBody>
+                    <a:bodyPr/>
+                    <a:lstStyle/>
+                    <a:p>
+                      <a:r>
+                        <a:rPr lang="ja-JP"/>
+                        <a:t>受注 150</a:t>
+                      </a:r>
+                    </a:p>
+                  </a:txBody>
+                  <a:tcPr/>
+                </a:tc>
+                <a:tc>
+                  <a:txBody>
+                    <a:bodyPr/>
+                    <a:lstStyle/>
+                    <a:p>
+                      <a:r>
+                        <a:rPr lang="ja-JP"/>
+                        <a:t>000 件／月</a:t>
+                      </a:r>
+                    </a:p>
+                  </a:txBody>
+                  <a:tcPr/>
+                </a:tc>
+                <a:tc>
+                  <a:txBody>
+                    <a:bodyPr/>
+                    <a:lstStyle/>
+                    <a:p>
+                      <a:r>
+                        <a:rPr lang="ja-JP"/>
+                        <a:t>同上</a:t>
+                      </a:r>
+                    </a:p>
+                  </a:txBody>
+                  <a:tcPr/>
+                </a:tc>
+              </a:tr>
+              <a:tr h="370000">
+                <a:tc>
+                  <a:txBody>
+                    <a:bodyPr/>
+                    <a:lstStyle/>
+                    <a:p>
+                      <a:r>
+                        <a:rPr lang="ja-JP"/>
+                        <a:t>可用性</a:t>
+                      </a:r>
+                    </a:p>
+                  </a:txBody>
+                  <a:tcPr/>
+                </a:tc>
+                <a:tc>
+                  <a:txBody>
+                    <a:bodyPr/>
+                    <a:lstStyle/>
+                    <a:p>
+                      <a:r>
+                        <a:rPr lang="ja-JP"/>
+                        <a:t>稼働率</a:t>
+                      </a:r>
+                    </a:p>
+                  </a:txBody>
+                  <a:tcPr/>
+                </a:tc>
+                <a:tc>
+                  <a:txBody>
+                    <a:bodyPr/>
+                    <a:lstStyle/>
+                    <a:p>
+                      <a:r>
+                        <a:rPr lang="ja-JP"/>
+                        <a:t>99.1%</a:t>
+                      </a:r>
+                    </a:p>
+                  </a:txBody>
+                  <a:tcPr/>
+                </a:tc>
+                <a:tc>
+                  <a:txBody>
+                    <a:bodyPr/>
+                    <a:lstStyle/>
+                    <a:p>
+                      <a:r>
+                        <a:rPr lang="ja-JP"/>
+                        <a:t>99.5% 以上</a:t>
+                      </a:r>
+                    </a:p>
+                  </a:txBody>
+                  <a:tcPr/>
+                </a:tc>
+                <a:tc>
+                  <a:txBody>
+                    <a:bodyPr/>
+                    <a:lstStyle/>
+                    <a:p>
+                      <a:r>
+                        <a:rPr lang="ja-JP"/>
+                        <a:t>計画停止を除く</a:t>
+                      </a:r>
+                    </a:p>
+                  </a:txBody>
+                  <a:tcPr/>
+                </a:tc>
+                <a:tc>
+                  <a:txBody>
+                    <a:bodyPr/>
+                    <a:lstStyle/>
+                    <a:p>
+                      <a:r>
+                        <a:rPr lang="ja-JP"/>
+                        <a:t>是正計画を提出</a:t>
+                      </a:r>
+                    </a:p>
+                  </a:txBody>
+                  <a:tcPr/>
+                </a:tc>
+                <a:tc>
+                  <a:txBody>
+                    <a:bodyPr/>
+                    <a:lstStyle/>
+                    <a:p>
+                      <a:r>
+                        <a:rPr lang="ja-JP"/>
+                        <a:t/>
+                      </a:r>
+                    </a:p>
+                  </a:txBody>
+                  <a:tcPr/>
+                </a:tc>
+              </a:tr>
+              <a:tr h="370000">
+                <a:tc vMerge="1">
+                  <a:txBody>
+                    <a:bodyPr/>
+                    <a:lstStyle/>
+                    <a:p>
+                      <a:r>
+                        <a:rPr lang="ja-JP"/>
+                        <a:t/>
+                      </a:r>
+                    </a:p>
+                  </a:txBody>
+                  <a:tcPr/>
+                </a:tc>
+                <a:tc>
+                  <a:txBody>
+                    <a:bodyPr/>
+                    <a:lstStyle/>
+                    <a:p>
+                      <a:r>
+                        <a:rPr lang="ja-JP"/>
+                        <a:t>目標復旧時間</a:t>
+                      </a:r>
+                    </a:p>
+                  </a:txBody>
+                  <a:tcPr/>
+                </a:tc>
+                <a:tc>
+                  <a:txBody>
+                    <a:bodyPr/>
+                    <a:lstStyle/>
+                    <a:p>
+                      <a:r>
+                        <a:rPr lang="ja-JP"/>
+                        <a:t/>
+                      </a:r>
+                    </a:p>
+                  </a:txBody>
+                  <a:tcPr/>
+                </a:tc>
+                <a:tc>
+                  <a:txBody>
+                    <a:bodyPr/>
+                    <a:lstStyle/>
+                    <a:p>
+                      <a:r>
+                        <a:rPr lang="ja-JP"/>
+                        <a:t>4 時間</a:t>
+                      </a:r>
+                    </a:p>
+                  </a:txBody>
+                  <a:tcPr/>
+                </a:tc>
+                <a:tc>
+                  <a:txBody>
+                    <a:bodyPr/>
+                    <a:lstStyle/>
+                    <a:p>
+                      <a:r>
+                        <a:rPr lang="ja-JP"/>
+                        <a:t>DR サイトへの切替を含む</a:t>
+                      </a:r>
+                    </a:p>
+                  </a:txBody>
+                  <a:tcPr/>
+                </a:tc>
+                <a:tc>
+                  <a:txBody>
+                    <a:bodyPr/>
+                    <a:lstStyle/>
+                    <a:p>
+                      <a:r>
+                        <a:rPr lang="ja-JP"/>
+                        <a:t>同上</a:t>
+                      </a:r>
+                    </a:p>
+                  </a:txBody>
+                  <a:tcPr/>
+                </a:tc>
+                <a:tc>
+                  <a:txBody>
+                    <a:bodyPr/>
+                    <a:lstStyle/>
+                    <a:p>
+                      <a:r>
+                        <a:rPr lang="ja-JP"/>
+                        <a:t/>
+                      </a:r>
+                    </a:p>
+                  </a:txBody>
+                  <a:tcPr/>
+                </a:tc>
+              </a:tr>
+            </a:tbl>
+          </a:graphicData>
+        </a:graphic>
+      </p:graphicFrame>
+    </p:spTree>
+  </p:cSld>
+</p:sld>
+</file>
+
+<file path=ppt/slides/slide13.xml><?xml version="1.0" encoding="utf-8"?>
+<p:sld xmlns:a="http://schemas.openxmlformats.org/drawingml/2006/main" xmlns:r="http://schemas.openxmlformats.org/officeDocument/2006/relationships" xmlns:p="http://schemas.openxmlformats.org/presentationml/2006/main" show="0">
+  <p:cSld>
+    <p:spTree>
+      <p:nvGrpSpPr>
+        <p:cNvPr id="1" name=""/>
+        <p:cNvGrpSpPr/>
+        <p:nvPr/>
+      </p:nvGrpSpPr>
+      <p:grpSpPr/>
+      <p:sp>
+        <p:nvSpPr>
+          <p:cNvPr id="2" name="タイトル 1"/>
+          <p:cNvSpPr>
+            <a:spLocks noGrp="1"/>
+          </p:cNvSpPr>
+          <p:nvPr>
+            <p:ph type="title"/>
+          </p:nvPr>
+        </p:nvSpPr>
+        <p:spPr>
+          <a:xfrm>
+            <a:off x="700000" y="500000"/>
+            <a:ext cx="10792000" cy="1000000"/>
+          </a:xfrm>
+          <a:prstGeom prst="rect">
+            <a:avLst/>
+          </a:prstGeom>
+        </p:spPr>
+        <p:txBody>
+          <a:bodyPr/>
+          <a:lstStyle/>
+          <a:p>
+            <a:r>
+              <a:rPr lang="ja-JP"/>
+              <a:t>全体構成（B 案・旧版）</a:t>
+            </a:r>
+          </a:p>
+        </p:txBody>
+      </p:sp>
+      <p:sp>
+        <p:nvSpPr>
+          <p:cNvPr id="3" name="現行維持"/>
+          <p:cNvSpPr>
+            <a:spLocks noGrp="1"/>
+          </p:cNvSpPr>
+          <p:nvPr/>
+        </p:nvSpPr>
+        <p:spPr>
+          <a:xfrm>
+            <a:off x="700000" y="1900000"/>
+            <a:ext cx="2200000" cy="900000"/>
+          </a:xfrm>
+          <a:prstGeom prst="rect">
+            <a:avLst/>
+          </a:prstGeom>
+        </p:spPr>
+        <p:txBody>
+          <a:bodyPr/>
+          <a:lstStyle/>
+          <a:p>
+            <a:r>
+              <a:rPr lang="ja-JP"/>
+              <a:t>現行を延命</a:t>
+            </a:r>
+          </a:p>
+        </p:txBody>
+      </p:sp>
+    </p:spTree>
+  </p:cSld>
+</p:sld>
+</file>
+
+<file path=ppt/slides/slide14.xml><?xml version="1.0" encoding="utf-8"?>
+<p:sld xmlns:a="http://schemas.openxmlformats.org/drawingml/2006/main" xmlns:r="http://schemas.openxmlformats.org/officeDocument/2006/relationships" xmlns:p="http://schemas.openxmlformats.org/presentationml/2006/main">
+  <p:cSld>
+    <p:spTree>
+      <p:nvGrpSpPr>
+        <p:cNvPr id="1" name=""/>
+        <p:cNvGrpSpPr/>
+        <p:nvPr/>
+      </p:nvGrpSpPr>
+      <p:grpSpPr/>
     </p:spTree>
   </p:cSld>
 </p:sld>
@@ -714,7 +2600,7 @@
           <a:ext cx="10792000" cy="1480000"/>
         </p:xfrm>
         <a:graphic>
-          <a:graphicData uri="http://schemas.openxmlformats.org/drawingml/2006/main/table">
+          <a:graphicData uri="http://schemas.openxmlformats.org/drawingml/2006/table">
             <a:tbl>
               <a:tblPr/>
               <a:tblGrid>
@@ -1952,7 +3838,7 @@
           <a:ext cx="10792000" cy="2960000"/>
         </p:xfrm>
         <a:graphic>
-          <a:graphicData uri="http://schemas.openxmlformats.org/drawingml/2006/main/table">
+          <a:graphicData uri="http://schemas.openxmlformats.org/drawingml/2006/table">
             <a:tbl>
               <a:tblPr/>
               <a:tblGrid>
@@ -2558,7 +4444,7 @@
           <a:ext cx="10792000" cy="1480000"/>
         </p:xfrm>
         <a:graphic>
-          <a:graphicData uri="http://schemas.openxmlformats.org/drawingml/2006/main/table">
+          <a:graphicData uri="http://schemas.openxmlformats.org/drawingml/2006/table">
             <a:tbl>
               <a:tblPr/>
               <a:tblGrid>
@@ -2934,7 +4820,7 @@
 </file>
 
 <file path=ppt/slides/slide9.xml><?xml version="1.0" encoding="utf-8"?>
-<p:sld xmlns:a="http://schemas.openxmlformats.org/drawingml/2006/main" xmlns:r="http://schemas.openxmlformats.org/officeDocument/2006/relationships" xmlns:p="http://schemas.openxmlformats.org/presentationml/2006/main" show="0">
+<p:sld xmlns:a="http://schemas.openxmlformats.org/drawingml/2006/main" xmlns:r="http://schemas.openxmlformats.org/officeDocument/2006/relationships" xmlns:p="http://schemas.openxmlformats.org/presentationml/2006/main">
   <p:cSld>
     <p:spTree>
       <p:nvGrpSpPr>
@@ -2968,39 +4854,597 @@
           <a:p>
             <a:r>
               <a:rPr lang="ja-JP"/>
-              <a:t>全体構成（B 案・旧版）</a:t>
+              <a:t>利用者と権限</a:t>
             </a:r>
           </a:p>
         </p:txBody>
       </p:sp>
-      <p:sp>
-        <p:nvSpPr>
-          <p:cNvPr id="3" name="現行維持"/>
-          <p:cNvSpPr>
-            <a:spLocks noGrp="1"/>
-          </p:cNvSpPr>
+      <p:graphicFrame>
+        <p:nvGraphicFramePr>
+          <p:cNvPr id="3" name="表 3"/>
+          <p:cNvGraphicFramePr/>
           <p:nvPr/>
-        </p:nvSpPr>
-        <p:spPr>
-          <a:xfrm>
-            <a:off x="700000" y="1900000"/>
-            <a:ext cx="2200000" cy="900000"/>
-          </a:xfrm>
-          <a:prstGeom prst="rect">
-            <a:avLst/>
-          </a:prstGeom>
-        </p:spPr>
-        <p:txBody>
-          <a:bodyPr/>
-          <a:lstStyle/>
-          <a:p>
-            <a:r>
-              <a:rPr lang="ja-JP"/>
-              <a:t>現行を延命</a:t>
-            </a:r>
-          </a:p>
-        </p:txBody>
-      </p:sp>
+        </p:nvGraphicFramePr>
+        <p:xfrm>
+          <a:off x="700000" y="1900000"/>
+          <a:ext cx="10792000" cy="2590000"/>
+        </p:xfrm>
+        <a:graphic>
+          <a:graphicData uri="http://schemas.openxmlformats.org/drawingml/2006/table">
+            <a:tbl>
+              <a:tblPr/>
+              <a:tblGrid>
+                <a:gridCol w="1798666"/>
+                <a:gridCol w="1798666"/>
+                <a:gridCol w="1798666"/>
+                <a:gridCol w="1798666"/>
+                <a:gridCol w="1798666"/>
+                <a:gridCol w="1798666"/>
+              </a:tblGrid>
+              <a:tr h="370000">
+                <a:tc>
+                  <a:txBody>
+                    <a:bodyPr/>
+                    <a:lstStyle/>
+                    <a:p>
+                      <a:r>
+                        <a:rPr lang="ja-JP"/>
+                        <a:t>区分</a:t>
+                      </a:r>
+                    </a:p>
+                  </a:txBody>
+                  <a:tcPr/>
+                </a:tc>
+                <a:tc>
+                  <a:txBody>
+                    <a:bodyPr/>
+                    <a:lstStyle/>
+                    <a:p>
+                      <a:r>
+                        <a:rPr lang="ja-JP"/>
+                        <a:t>ロール</a:t>
+                      </a:r>
+                    </a:p>
+                  </a:txBody>
+                  <a:tcPr/>
+                </a:tc>
+                <a:tc>
+                  <a:txBody>
+                    <a:bodyPr/>
+                    <a:lstStyle/>
+                    <a:p>
+                      <a:r>
+                        <a:rPr lang="ja-JP"/>
+                        <a:t>受注登録</a:t>
+                      </a:r>
+                    </a:p>
+                  </a:txBody>
+                  <a:tcPr/>
+                </a:tc>
+                <a:tc>
+                  <a:txBody>
+                    <a:bodyPr/>
+                    <a:lstStyle/>
+                    <a:p>
+                      <a:r>
+                        <a:rPr lang="ja-JP"/>
+                        <a:t>与信照会</a:t>
+                      </a:r>
+                    </a:p>
+                  </a:txBody>
+                  <a:tcPr/>
+                </a:tc>
+                <a:tc>
+                  <a:txBody>
+                    <a:bodyPr/>
+                    <a:lstStyle/>
+                    <a:p>
+                      <a:r>
+                        <a:rPr lang="ja-JP"/>
+                        <a:t>出荷指示</a:t>
+                      </a:r>
+                    </a:p>
+                  </a:txBody>
+                  <a:tcPr/>
+                </a:tc>
+                <a:tc>
+                  <a:txBody>
+                    <a:bodyPr/>
+                    <a:lstStyle/>
+                    <a:p>
+                      <a:r>
+                        <a:rPr lang="ja-JP"/>
+                        <a:t>承認</a:t>
+                      </a:r>
+                    </a:p>
+                  </a:txBody>
+                  <a:tcPr/>
+                </a:tc>
+              </a:tr>
+              <a:tr h="370000">
+                <a:tc>
+                  <a:txBody>
+                    <a:bodyPr/>
+                    <a:lstStyle/>
+                    <a:p>
+                      <a:r>
+                        <a:rPr lang="ja-JP"/>
+                        <a:t>営業</a:t>
+                      </a:r>
+                    </a:p>
+                  </a:txBody>
+                  <a:tcPr/>
+                </a:tc>
+                <a:tc>
+                  <a:txBody>
+                    <a:bodyPr/>
+                    <a:lstStyle/>
+                    <a:p>
+                      <a:r>
+                        <a:rPr lang="ja-JP"/>
+                        <a:t>営業担当</a:t>
+                      </a:r>
+                    </a:p>
+                  </a:txBody>
+                  <a:tcPr/>
+                </a:tc>
+                <a:tc>
+                  <a:txBody>
+                    <a:bodyPr/>
+                    <a:lstStyle/>
+                    <a:p>
+                      <a:r>
+                        <a:rPr lang="ja-JP"/>
+                        <a:t>C／R／U</a:t>
+                      </a:r>
+                    </a:p>
+                  </a:txBody>
+                  <a:tcPr/>
+                </a:tc>
+                <a:tc>
+                  <a:txBody>
+                    <a:bodyPr/>
+                    <a:lstStyle/>
+                    <a:p>
+                      <a:r>
+                        <a:rPr lang="ja-JP"/>
+                        <a:t>R</a:t>
+                      </a:r>
+                    </a:p>
+                  </a:txBody>
+                  <a:tcPr/>
+                </a:tc>
+                <a:tc>
+                  <a:txBody>
+                    <a:bodyPr/>
+                    <a:lstStyle/>
+                    <a:p>
+                      <a:r>
+                        <a:rPr lang="ja-JP"/>
+                        <a:t>―</a:t>
+                      </a:r>
+                    </a:p>
+                  </a:txBody>
+                  <a:tcPr/>
+                </a:tc>
+                <a:tc>
+                  <a:txBody>
+                    <a:bodyPr/>
+                    <a:lstStyle/>
+                    <a:p>
+                      <a:r>
+                        <a:rPr lang="ja-JP"/>
+                        <a:t>―</a:t>
+                      </a:r>
+                    </a:p>
+                  </a:txBody>
+                  <a:tcPr/>
+                </a:tc>
+              </a:tr>
+              <a:tr h="370000">
+                <a:tc vMerge="1">
+                  <a:txBody>
+                    <a:bodyPr/>
+                    <a:lstStyle/>
+                    <a:p>
+                      <a:r>
+                        <a:rPr lang="ja-JP"/>
+                        <a:t/>
+                      </a:r>
+                    </a:p>
+                  </a:txBody>
+                  <a:tcPr/>
+                </a:tc>
+                <a:tc>
+                  <a:txBody>
+                    <a:bodyPr/>
+                    <a:lstStyle/>
+                    <a:p>
+                      <a:r>
+                        <a:rPr lang="ja-JP"/>
+                        <a:t>営業部長</a:t>
+                      </a:r>
+                    </a:p>
+                  </a:txBody>
+                  <a:tcPr/>
+                </a:tc>
+                <a:tc>
+                  <a:txBody>
+                    <a:bodyPr/>
+                    <a:lstStyle/>
+                    <a:p>
+                      <a:r>
+                        <a:rPr lang="ja-JP"/>
+                        <a:t>R</a:t>
+                      </a:r>
+                    </a:p>
+                  </a:txBody>
+                  <a:tcPr/>
+                </a:tc>
+                <a:tc>
+                  <a:txBody>
+                    <a:bodyPr/>
+                    <a:lstStyle/>
+                    <a:p>
+                      <a:r>
+                        <a:rPr lang="ja-JP"/>
+                        <a:t>R</a:t>
+                      </a:r>
+                    </a:p>
+                  </a:txBody>
+                  <a:tcPr/>
+                </a:tc>
+                <a:tc>
+                  <a:txBody>
+                    <a:bodyPr/>
+                    <a:lstStyle/>
+                    <a:p>
+                      <a:r>
+                        <a:rPr lang="ja-JP"/>
+                        <a:t>―</a:t>
+                      </a:r>
+                    </a:p>
+                  </a:txBody>
+                  <a:tcPr/>
+                </a:tc>
+                <a:tc>
+                  <a:txBody>
+                    <a:bodyPr/>
+                    <a:lstStyle/>
+                    <a:p>
+                      <a:r>
+                        <a:rPr lang="ja-JP"/>
+                        <a:t>○</a:t>
+                      </a:r>
+                    </a:p>
+                  </a:txBody>
+                  <a:tcPr/>
+                </a:tc>
+              </a:tr>
+              <a:tr h="370000">
+                <a:tc vMerge="1">
+                  <a:txBody>
+                    <a:bodyPr/>
+                    <a:lstStyle/>
+                    <a:p>
+                      <a:r>
+                        <a:rPr lang="ja-JP"/>
+                        <a:t/>
+                      </a:r>
+                    </a:p>
+                  </a:txBody>
+                  <a:tcPr/>
+                </a:tc>
+                <a:tc>
+                  <a:txBody>
+                    <a:bodyPr/>
+                    <a:lstStyle/>
+                    <a:p>
+                      <a:r>
+                        <a:rPr lang="ja-JP"/>
+                        <a:t>営業事務</a:t>
+                      </a:r>
+                    </a:p>
+                  </a:txBody>
+                  <a:tcPr/>
+                </a:tc>
+                <a:tc>
+                  <a:txBody>
+                    <a:bodyPr/>
+                    <a:lstStyle/>
+                    <a:p>
+                      <a:r>
+                        <a:rPr lang="ja-JP"/>
+                        <a:t>R</a:t>
+                      </a:r>
+                    </a:p>
+                  </a:txBody>
+                  <a:tcPr/>
+                </a:tc>
+                <a:tc>
+                  <a:txBody>
+                    <a:bodyPr/>
+                    <a:lstStyle/>
+                    <a:p>
+                      <a:r>
+                        <a:rPr lang="ja-JP"/>
+                        <a:t/>
+                      </a:r>
+                    </a:p>
+                  </a:txBody>
+                  <a:tcPr/>
+                </a:tc>
+                <a:tc>
+                  <a:txBody>
+                    <a:bodyPr/>
+                    <a:lstStyle/>
+                    <a:p>
+                      <a:r>
+                        <a:rPr lang="ja-JP"/>
+                        <a:t/>
+                      </a:r>
+                    </a:p>
+                  </a:txBody>
+                  <a:tcPr/>
+                </a:tc>
+                <a:tc>
+                  <a:txBody>
+                    <a:bodyPr/>
+                    <a:lstStyle/>
+                    <a:p>
+                      <a:r>
+                        <a:rPr lang="ja-JP"/>
+                        <a:t/>
+                      </a:r>
+                    </a:p>
+                  </a:txBody>
+                  <a:tcPr/>
+                </a:tc>
+              </a:tr>
+              <a:tr h="370000">
+                <a:tc>
+                  <a:txBody>
+                    <a:bodyPr/>
+                    <a:lstStyle/>
+                    <a:p>
+                      <a:r>
+                        <a:rPr lang="ja-JP"/>
+                        <a:t>管理</a:t>
+                      </a:r>
+                    </a:p>
+                  </a:txBody>
+                  <a:tcPr/>
+                </a:tc>
+                <a:tc>
+                  <a:txBody>
+                    <a:bodyPr/>
+                    <a:lstStyle/>
+                    <a:p>
+                      <a:r>
+                        <a:rPr lang="ja-JP"/>
+                        <a:t>与信管理課長</a:t>
+                      </a:r>
+                    </a:p>
+                  </a:txBody>
+                  <a:tcPr/>
+                </a:tc>
+                <a:tc>
+                  <a:txBody>
+                    <a:bodyPr/>
+                    <a:lstStyle/>
+                    <a:p>
+                      <a:r>
+                        <a:rPr lang="ja-JP"/>
+                        <a:t>R</a:t>
+                      </a:r>
+                    </a:p>
+                  </a:txBody>
+                  <a:tcPr/>
+                </a:tc>
+                <a:tc>
+                  <a:txBody>
+                    <a:bodyPr/>
+                    <a:lstStyle/>
+                    <a:p>
+                      <a:r>
+                        <a:rPr lang="ja-JP"/>
+                        <a:t>C／R／U</a:t>
+                      </a:r>
+                    </a:p>
+                  </a:txBody>
+                  <a:tcPr/>
+                </a:tc>
+                <a:tc>
+                  <a:txBody>
+                    <a:bodyPr/>
+                    <a:lstStyle/>
+                    <a:p>
+                      <a:r>
+                        <a:rPr lang="ja-JP"/>
+                        <a:t>―</a:t>
+                      </a:r>
+                    </a:p>
+                  </a:txBody>
+                  <a:tcPr/>
+                </a:tc>
+                <a:tc>
+                  <a:txBody>
+                    <a:bodyPr/>
+                    <a:lstStyle/>
+                    <a:p>
+                      <a:r>
+                        <a:rPr lang="ja-JP"/>
+                        <a:t>○</a:t>
+                      </a:r>
+                    </a:p>
+                  </a:txBody>
+                  <a:tcPr/>
+                </a:tc>
+              </a:tr>
+              <a:tr h="370000">
+                <a:tc>
+                  <a:txBody>
+                    <a:bodyPr/>
+                    <a:lstStyle/>
+                    <a:p>
+                      <a:r>
+                        <a:rPr lang="ja-JP"/>
+                        <a:t>物流</a:t>
+                      </a:r>
+                    </a:p>
+                  </a:txBody>
+                  <a:tcPr/>
+                </a:tc>
+                <a:tc>
+                  <a:txBody>
+                    <a:bodyPr/>
+                    <a:lstStyle/>
+                    <a:p>
+                      <a:r>
+                        <a:rPr lang="ja-JP"/>
+                        <a:t>出荷担当</a:t>
+                      </a:r>
+                    </a:p>
+                  </a:txBody>
+                  <a:tcPr/>
+                </a:tc>
+                <a:tc>
+                  <a:txBody>
+                    <a:bodyPr/>
+                    <a:lstStyle/>
+                    <a:p>
+                      <a:r>
+                        <a:rPr lang="ja-JP"/>
+                        <a:t>R</a:t>
+                      </a:r>
+                    </a:p>
+                  </a:txBody>
+                  <a:tcPr/>
+                </a:tc>
+                <a:tc>
+                  <a:txBody>
+                    <a:bodyPr/>
+                    <a:lstStyle/>
+                    <a:p>
+                      <a:r>
+                        <a:rPr lang="ja-JP"/>
+                        <a:t>―</a:t>
+                      </a:r>
+                    </a:p>
+                  </a:txBody>
+                  <a:tcPr/>
+                </a:tc>
+                <a:tc>
+                  <a:txBody>
+                    <a:bodyPr/>
+                    <a:lstStyle/>
+                    <a:p>
+                      <a:r>
+                        <a:rPr lang="ja-JP"/>
+                        <a:t>C／U</a:t>
+                      </a:r>
+                    </a:p>
+                  </a:txBody>
+                  <a:tcPr/>
+                </a:tc>
+                <a:tc>
+                  <a:txBody>
+                    <a:bodyPr/>
+                    <a:lstStyle/>
+                    <a:p>
+                      <a:r>
+                        <a:rPr lang="ja-JP"/>
+                        <a:t>―</a:t>
+                      </a:r>
+                    </a:p>
+                  </a:txBody>
+                  <a:tcPr/>
+                </a:tc>
+              </a:tr>
+              <a:tr h="370000">
+                <a:tc>
+                  <a:txBody>
+                    <a:bodyPr/>
+                    <a:lstStyle/>
+                    <a:p>
+                      <a:r>
+                        <a:rPr lang="ja-JP"/>
+                        <a:t>システム</a:t>
+                      </a:r>
+                    </a:p>
+                  </a:txBody>
+                  <a:tcPr/>
+                </a:tc>
+                <a:tc>
+                  <a:txBody>
+                    <a:bodyPr/>
+                    <a:lstStyle/>
+                    <a:p>
+                      <a:r>
+                        <a:rPr lang="ja-JP"/>
+                        <a:t>運用担当</a:t>
+                      </a:r>
+                    </a:p>
+                  </a:txBody>
+                  <a:tcPr/>
+                </a:tc>
+                <a:tc>
+                  <a:txBody>
+                    <a:bodyPr/>
+                    <a:lstStyle/>
+                    <a:p>
+                      <a:r>
+                        <a:rPr lang="ja-JP"/>
+                        <a:t>R</a:t>
+                      </a:r>
+                    </a:p>
+                  </a:txBody>
+                  <a:tcPr/>
+                </a:tc>
+                <a:tc>
+                  <a:txBody>
+                    <a:bodyPr/>
+                    <a:lstStyle/>
+                    <a:p>
+                      <a:r>
+                        <a:rPr lang="ja-JP"/>
+                        <a:t>R</a:t>
+                      </a:r>
+                    </a:p>
+                  </a:txBody>
+                  <a:tcPr/>
+                </a:tc>
+                <a:tc>
+                  <a:txBody>
+                    <a:bodyPr/>
+                    <a:lstStyle/>
+                    <a:p>
+                      <a:r>
+                        <a:rPr lang="ja-JP"/>
+                        <a:t>R</a:t>
+                      </a:r>
+                    </a:p>
+                  </a:txBody>
+                  <a:tcPr/>
+                </a:tc>
+                <a:tc>
+                  <a:txBody>
+                    <a:bodyPr/>
+                    <a:lstStyle/>
+                    <a:p>
+                      <a:r>
+                        <a:rPr lang="ja-JP"/>
+                        <a:t>―</a:t>
+                      </a:r>
+                    </a:p>
+                  </a:txBody>
+                  <a:tcPr/>
+                </a:tc>
+              </a:tr>
+            </a:tbl>
+          </a:graphicData>
+        </a:graphic>
+      </p:graphicFrame>
     </p:spTree>
   </p:cSld>
 </p:sld>
@@ -3116,4 +5560,116 @@
     </a:fmtScheme>
   </a:themeElements>
 </a:theme>
+</file>
+
+<file path=ppt/theme/theme2.xml><?xml version="1.0" encoding="utf-8"?>
+<a:theme xmlns:a="http://schemas.openxmlformats.org/drawingml/2006/main" name="arp4 検体 ノート">
+  <a:themeElements>
+    <a:clrScheme name="arp4">
+      <a:dk1>
+        <a:srgbClr val="000000"/>
+      </a:dk1>
+      <a:lt1>
+        <a:srgbClr val="FFFFFF"/>
+      </a:lt1>
+      <a:dk2>
+        <a:srgbClr val="44546A"/>
+      </a:dk2>
+      <a:lt2>
+        <a:srgbClr val="E7E6E6"/>
+      </a:lt2>
+      <a:accent1>
+        <a:srgbClr val="4472C4"/>
+      </a:accent1>
+      <a:accent2>
+        <a:srgbClr val="ED7D31"/>
+      </a:accent2>
+      <a:accent3>
+        <a:srgbClr val="A5A5A5"/>
+      </a:accent3>
+      <a:accent4>
+        <a:srgbClr val="FFC000"/>
+      </a:accent4>
+      <a:accent5>
+        <a:srgbClr val="5B9BD5"/>
+      </a:accent5>
+      <a:accent6>
+        <a:srgbClr val="70AD47"/>
+      </a:accent6>
+      <a:hlink>
+        <a:srgbClr val="0563C1"/>
+      </a:hlink>
+      <a:folHlink>
+        <a:srgbClr val="954F72"/>
+      </a:folHlink>
+    </a:clrScheme>
+    <a:fontScheme name="arp4">
+      <a:majorFont>
+        <a:latin typeface="Yu Gothic"/>
+        <a:ea typeface="Yu Gothic"/>
+        <a:cs typeface=""/>
+      </a:majorFont>
+      <a:minorFont>
+        <a:latin typeface="Yu Gothic"/>
+        <a:ea typeface="Yu Gothic"/>
+        <a:cs typeface=""/>
+      </a:minorFont>
+    </a:fontScheme>
+    <a:fmtScheme name="arp4">
+      <a:fillStyleLst>
+        <a:solidFill>
+          <a:schemeClr val="phClr"/>
+        </a:solidFill>
+        <a:solidFill>
+          <a:schemeClr val="phClr"/>
+        </a:solidFill>
+        <a:solidFill>
+          <a:schemeClr val="phClr"/>
+        </a:solidFill>
+      </a:fillStyleLst>
+      <a:lnStyleLst>
+        <a:ln w="6350" cap="flat" cmpd="sng" algn="ctr">
+          <a:solidFill>
+            <a:schemeClr val="phClr"/>
+          </a:solidFill>
+          <a:prstDash val="solid"/>
+        </a:ln>
+        <a:ln w="6350" cap="flat" cmpd="sng" algn="ctr">
+          <a:solidFill>
+            <a:schemeClr val="phClr"/>
+          </a:solidFill>
+          <a:prstDash val="solid"/>
+        </a:ln>
+        <a:ln w="6350" cap="flat" cmpd="sng" algn="ctr">
+          <a:solidFill>
+            <a:schemeClr val="phClr"/>
+          </a:solidFill>
+          <a:prstDash val="solid"/>
+        </a:ln>
+      </a:lnStyleLst>
+      <a:effectStyleLst>
+        <a:effectStyle>
+          <a:effectLst/>
+        </a:effectStyle>
+        <a:effectStyle>
+          <a:effectLst/>
+        </a:effectStyle>
+        <a:effectStyle>
+          <a:effectLst/>
+        </a:effectStyle>
+      </a:effectStyleLst>
+      <a:bgFillStyleLst>
+        <a:solidFill>
+          <a:schemeClr val="phClr"/>
+        </a:solidFill>
+        <a:solidFill>
+          <a:schemeClr val="phClr"/>
+        </a:solidFill>
+        <a:solidFill>
+          <a:schemeClr val="phClr"/>
+        </a:solidFill>
+      </a:bgFillStyleLst>
+    </a:fmtScheme>
+  </a:themeElements>
+</a:theme>
 </file>